--- a/docs/submission/春招平行宇宙-决赛答辩.pptx
+++ b/docs/submission/春招平行宇宙-决赛答辩.pptx
@@ -15,13 +15,8 @@
     <p:sldId id="263" r:id="rId14"/>
     <p:sldId id="264" r:id="rId15"/>
     <p:sldId id="265" r:id="rId16"/>
-    <p:sldId id="266" r:id="rId17"/>
-    <p:sldId id="267" r:id="rId18"/>
-    <p:sldId id="268" r:id="rId19"/>
-    <p:sldId id="269" r:id="rId20"/>
-    <p:sldId id="270" r:id="rId21"/>
   </p:sldIdLst>
-  <p:sldSz cx="12191695" cy="6858000" type="screen4x3"/>
+  <p:sldSz cx="9144000" cy="6858000" type="screen4x3"/>
   <p:notesSz cx="6858000" cy="9144000"/>
   <p:defaultTextStyle>
     <a:defPPr>
@@ -3095,14 +3090,6 @@
 <file path=ppt/slides/slide1.xml><?xml version="1.0" encoding="utf-8"?>
 <p:sld xmlns:a="http://schemas.openxmlformats.org/drawingml/2006/main" xmlns:p="http://schemas.openxmlformats.org/presentationml/2006/main" xmlns:r="http://schemas.openxmlformats.org/officeDocument/2006/relationships">
   <p:cSld>
-    <p:bg>
-      <p:bgPr>
-        <a:solidFill>
-          <a:srgbClr val="0A0E1A"/>
-        </a:solidFill>
-        <a:effectLst/>
-      </p:bgPr>
-    </p:bg>
     <p:spTree>
       <p:nvGrpSpPr>
         <p:cNvPr id="1" name=""/>
@@ -3110,30 +3097,69 @@
         <p:nvPr/>
       </p:nvGrpSpPr>
       <p:grpSpPr/>
-      <p:pic>
-        <p:nvPicPr>
-          <p:cNvPr id="2" name="Picture 1" descr="design_cover.png"/>
-          <p:cNvPicPr>
-            <a:picLocks noChangeAspect="1"/>
-          </p:cNvPicPr>
-          <p:nvPr/>
-        </p:nvPicPr>
-        <p:blipFill>
-          <a:blip r:embed="rId2"/>
-          <a:stretch>
-            <a:fillRect/>
-          </a:stretch>
-        </p:blipFill>
-        <p:spPr>
-          <a:xfrm>
-            <a:off x="0" y="0"/>
-            <a:ext cx="12191695" cy="6858000"/>
-          </a:xfrm>
-          <a:prstGeom prst="rect">
-            <a:avLst/>
-          </a:prstGeom>
-        </p:spPr>
-      </p:pic>
+      <p:sp>
+        <p:nvSpPr>
+          <p:cNvPr id="2" name="Title 1"/>
+          <p:cNvSpPr>
+            <a:spLocks noGrp="1"/>
+          </p:cNvSpPr>
+          <p:nvPr>
+            <p:ph type="ctrTitle"/>
+          </p:nvPr>
+        </p:nvSpPr>
+        <p:spPr/>
+        <p:txBody>
+          <a:bodyPr/>
+          <a:lstStyle/>
+          <a:p>
+            <a:r>
+              <a:t>春招平行宇宙</a:t>
+            </a:r>
+          </a:p>
+          <a:p>
+            <a:r>
+              <a:t>Career Multiverse</a:t>
+            </a:r>
+          </a:p>
+        </p:txBody>
+      </p:sp>
+      <p:sp>
+        <p:nvSpPr>
+          <p:cNvPr id="3" name="Subtitle 2"/>
+          <p:cNvSpPr>
+            <a:spLocks noGrp="1"/>
+          </p:cNvSpPr>
+          <p:nvPr>
+            <p:ph type="subTitle" idx="1"/>
+          </p:nvPr>
+        </p:nvSpPr>
+        <p:spPr/>
+        <p:txBody>
+          <a:bodyPr/>
+          <a:lstStyle/>
+          <a:p>
+            <a:r>
+              <a:t>让 AI 替你跑完 1000 次春招</a:t>
+            </a:r>
+          </a:p>
+          <a:p/>
+          <a:p>
+            <a:r>
+              <a:t>可实验的人才市场沙盘</a:t>
+            </a:r>
+          </a:p>
+          <a:p>
+            <a:r>
+              <a:t>tljcpa</a:t>
+            </a:r>
+          </a:p>
+          <a:p>
+            <a:r>
+              <a:t>2026年7月</a:t>
+            </a:r>
+          </a:p>
+        </p:txBody>
+      </p:sp>
     </p:spTree>
   </p:cSld>
   <p:clrMapOvr>
@@ -3145,14 +3171,6 @@
 <file path=ppt/slides/slide10.xml><?xml version="1.0" encoding="utf-8"?>
 <p:sld xmlns:a="http://schemas.openxmlformats.org/drawingml/2006/main" xmlns:p="http://schemas.openxmlformats.org/presentationml/2006/main" xmlns:r="http://schemas.openxmlformats.org/officeDocument/2006/relationships">
   <p:cSld>
-    <p:bg>
-      <p:bgPr>
-        <a:solidFill>
-          <a:srgbClr val="0A0E1A"/>
-        </a:solidFill>
-        <a:effectLst/>
-      </p:bgPr>
-    </p:bg>
     <p:spTree>
       <p:nvGrpSpPr>
         <p:cNvPr id="1" name=""/>
@@ -3160,869 +3178,80 @@
         <p:nvPr/>
       </p:nvGrpSpPr>
       <p:grpSpPr/>
-      <p:pic>
-        <p:nvPicPr>
-          <p:cNvPr id="2" name="Picture 1" descr="design_chain.png"/>
-          <p:cNvPicPr>
-            <a:picLocks noChangeAspect="1"/>
-          </p:cNvPicPr>
-          <p:nvPr/>
-        </p:nvPicPr>
-        <p:blipFill>
-          <a:blip r:embed="rId2"/>
-          <a:stretch>
-            <a:fillRect/>
-          </a:stretch>
-        </p:blipFill>
-        <p:spPr>
-          <a:xfrm>
-            <a:off x="0" y="0"/>
-            <a:ext cx="12191695" cy="6858000"/>
-          </a:xfrm>
-          <a:prstGeom prst="rect">
-            <a:avLst/>
-          </a:prstGeom>
-        </p:spPr>
-      </p:pic>
-    </p:spTree>
-  </p:cSld>
-  <p:clrMapOvr>
-    <a:masterClrMapping/>
-  </p:clrMapOvr>
-</p:sld>
-</file>
-
-<file path=ppt/slides/slide11.xml><?xml version="1.0" encoding="utf-8"?>
-<p:sld xmlns:a="http://schemas.openxmlformats.org/drawingml/2006/main" xmlns:p="http://schemas.openxmlformats.org/presentationml/2006/main" xmlns:r="http://schemas.openxmlformats.org/officeDocument/2006/relationships">
-  <p:cSld>
-    <p:bg>
-      <p:bgPr>
-        <a:solidFill>
-          <a:srgbClr val="0A0E1A"/>
-        </a:solidFill>
-        <a:effectLst/>
-      </p:bgPr>
-    </p:bg>
-    <p:spTree>
-      <p:nvGrpSpPr>
-        <p:cNvPr id="1" name=""/>
-        <p:cNvGrpSpPr/>
-        <p:nvPr/>
-      </p:nvGrpSpPr>
-      <p:grpSpPr/>
-      <p:sp>
-        <p:nvSpPr>
-          <p:cNvPr id="2" name="TextBox 1"/>
-          <p:cNvSpPr txBox="1"/>
-          <p:nvPr/>
-        </p:nvSpPr>
-        <p:spPr>
-          <a:xfrm>
-            <a:off x="822960" y="822960"/>
-            <a:ext cx="10515600" cy="914400"/>
-          </a:xfrm>
-          <a:prstGeom prst="rect">
-            <a:avLst/>
-          </a:prstGeom>
-          <a:noFill/>
-        </p:spPr>
-        <p:txBody>
-          <a:bodyPr wrap="square">
-            <a:spAutoFit/>
-          </a:bodyPr>
-          <a:lstStyle/>
-          <a:p>
-            <a:pPr algn="l"/>
-            <a:r>
-              <a:rPr sz="3200" b="1">
-                <a:solidFill>
-                  <a:srgbClr val="22D3EE"/>
-                </a:solidFill>
-                <a:latin typeface="微软雅黑"/>
-              </a:rPr>
-              <a:t>从 demo 到全量：我们的引擎 × 平台的数据</a:t>
-            </a:r>
-          </a:p>
-        </p:txBody>
-      </p:sp>
-      <p:sp>
-        <p:nvSpPr>
-          <p:cNvPr id="3" name="Rounded Rectangle 2"/>
-          <p:cNvSpPr/>
-          <p:nvPr/>
-        </p:nvSpPr>
-        <p:spPr>
-          <a:xfrm>
-            <a:off x="822960" y="2103120"/>
-            <a:ext cx="10515600" cy="3840480"/>
-          </a:xfrm>
-          <a:prstGeom prst="roundRect">
-            <a:avLst/>
-          </a:prstGeom>
-          <a:solidFill>
-            <a:srgbClr val="131829"/>
-          </a:solidFill>
-          <a:ln w="12700">
-            <a:solidFill>
-              <a:srgbClr val="22D3EE"/>
-            </a:solidFill>
-          </a:ln>
-          <a:effectLst/>
-        </p:spPr>
-        <p:style>
-          <a:lnRef idx="1">
-            <a:schemeClr val="accent1"/>
-          </a:lnRef>
-          <a:fillRef idx="3">
-            <a:schemeClr val="accent1"/>
-          </a:fillRef>
-          <a:effectRef idx="2">
-            <a:schemeClr val="accent1"/>
-          </a:effectRef>
-          <a:fontRef idx="minor">
-            <a:schemeClr val="lt1"/>
-          </a:fontRef>
-        </p:style>
-        <p:txBody>
-          <a:bodyPr rtlCol="0" anchor="t" wrap="square" lIns="457200" tIns="365760"/>
-          <a:lstStyle/>
-          <a:p>
-            <a:pPr algn="ctr">
-              <a:spcAft>
-                <a:spcPts val="1400"/>
-              </a:spcAft>
-            </a:pPr>
-            <a:r>
-              <a:rPr sz="1800" b="0">
-                <a:solidFill>
-                  <a:srgbClr val="E5E9F0"/>
-                </a:solidFill>
-                <a:latin typeface="微软雅黑"/>
-              </a:rPr>
-              <a:t>·  现在：约 300 家虚构公司的沙盘——作用是证明引擎跑得通</a:t>
-            </a:r>
-          </a:p>
-          <a:p>
-            <a:pPr>
-              <a:spcAft>
-                <a:spcPts val="1400"/>
-              </a:spcAft>
-            </a:pPr>
-            <a:r>
-              <a:rPr sz="1800" b="0">
-                <a:solidFill>
-                  <a:srgbClr val="E5E9F0"/>
-                </a:solidFill>
-                <a:latin typeface="微软雅黑"/>
-              </a:rPr>
-              <a:t>·  核心资产不是数据量，是「让人才市场可实验」的引擎与方法论</a:t>
-            </a:r>
-          </a:p>
-          <a:p>
-            <a:pPr>
-              <a:spcAft>
-                <a:spcPts val="1400"/>
-              </a:spcAft>
-            </a:pPr>
-            <a:r>
-              <a:rPr sz="1800" b="0">
-                <a:solidFill>
-                  <a:srgbClr val="E5E9F0"/>
-                </a:solidFill>
-                <a:latin typeface="微软雅黑"/>
-              </a:rPr>
-              <a:t>·  接入平台级全量真实数据 + 算力 → 覆盖真实市场的人才市场数字孪生</a:t>
-            </a:r>
-          </a:p>
-          <a:p>
-            <a:pPr>
-              <a:spcAft>
-                <a:spcPts val="1400"/>
-              </a:spcAft>
-            </a:pPr>
-            <a:r>
-              <a:rPr sz="1800" b="0">
-                <a:solidFill>
-                  <a:srgbClr val="E5E9F0"/>
-                </a:solidFill>
-                <a:latin typeface="微软雅黑"/>
-              </a:rPr>
-              <a:t>·  这正是与平台最自然的合作：我们出引擎和方法，平台出数据、算力、场景</a:t>
-            </a:r>
-          </a:p>
-          <a:p>
-            <a:pPr>
-              <a:spcAft>
-                <a:spcPts val="1400"/>
-              </a:spcAft>
-            </a:pPr>
-            <a:r>
-              <a:rPr sz="1800" b="0">
-                <a:solidFill>
-                  <a:srgbClr val="E5E9F0"/>
-                </a:solidFill>
-                <a:latin typeface="微软雅黑"/>
-              </a:rPr>
-              <a:t>·  「缺数据」不是短板，是合作接口；全量下用分层架构（粗筛 + 精模拟）承接</a:t>
-            </a:r>
-          </a:p>
-        </p:txBody>
-      </p:sp>
-    </p:spTree>
-  </p:cSld>
-  <p:clrMapOvr>
-    <a:masterClrMapping/>
-  </p:clrMapOvr>
-</p:sld>
-</file>
-
-<file path=ppt/slides/slide12.xml><?xml version="1.0" encoding="utf-8"?>
-<p:sld xmlns:a="http://schemas.openxmlformats.org/drawingml/2006/main" xmlns:p="http://schemas.openxmlformats.org/presentationml/2006/main" xmlns:r="http://schemas.openxmlformats.org/officeDocument/2006/relationships">
-  <p:cSld>
-    <p:bg>
-      <p:bgPr>
-        <a:solidFill>
-          <a:srgbClr val="0A0E1A"/>
-        </a:solidFill>
-        <a:effectLst/>
-      </p:bgPr>
-    </p:bg>
-    <p:spTree>
-      <p:nvGrpSpPr>
-        <p:cNvPr id="1" name=""/>
-        <p:cNvGrpSpPr/>
-        <p:nvPr/>
-      </p:nvGrpSpPr>
-      <p:grpSpPr/>
-      <p:sp>
-        <p:nvSpPr>
-          <p:cNvPr id="2" name="TextBox 1"/>
-          <p:cNvSpPr txBox="1"/>
-          <p:nvPr/>
-        </p:nvSpPr>
-        <p:spPr>
-          <a:xfrm>
-            <a:off x="822960" y="822960"/>
-            <a:ext cx="10515600" cy="914400"/>
-          </a:xfrm>
-          <a:prstGeom prst="rect">
-            <a:avLst/>
-          </a:prstGeom>
-          <a:noFill/>
-        </p:spPr>
-        <p:txBody>
-          <a:bodyPr wrap="square">
-            <a:spAutoFit/>
-          </a:bodyPr>
-          <a:lstStyle/>
-          <a:p>
-            <a:pPr algn="l"/>
-            <a:r>
-              <a:rPr sz="3200" b="1">
-                <a:solidFill>
-                  <a:srgbClr val="FBBF24"/>
-                </a:solidFill>
-                <a:latin typeface="微软雅黑"/>
-              </a:rPr>
-              <a:t>数字孪生对齐引擎（愿景 / 路线图，尚未实现）</a:t>
-            </a:r>
-          </a:p>
-        </p:txBody>
-      </p:sp>
-      <p:sp>
-        <p:nvSpPr>
-          <p:cNvPr id="3" name="Rounded Rectangle 2"/>
-          <p:cNvSpPr/>
-          <p:nvPr/>
-        </p:nvSpPr>
-        <p:spPr>
-          <a:xfrm>
-            <a:off x="822960" y="2103120"/>
-            <a:ext cx="10515600" cy="3840480"/>
-          </a:xfrm>
-          <a:prstGeom prst="roundRect">
-            <a:avLst/>
-          </a:prstGeom>
-          <a:solidFill>
-            <a:srgbClr val="131829"/>
-          </a:solidFill>
-          <a:ln w="12700">
-            <a:solidFill>
-              <a:srgbClr val="22D3EE"/>
-            </a:solidFill>
-          </a:ln>
-          <a:effectLst/>
-        </p:spPr>
-        <p:style>
-          <a:lnRef idx="1">
-            <a:schemeClr val="accent1"/>
-          </a:lnRef>
-          <a:fillRef idx="3">
-            <a:schemeClr val="accent1"/>
-          </a:fillRef>
-          <a:effectRef idx="2">
-            <a:schemeClr val="accent1"/>
-          </a:effectRef>
-          <a:fontRef idx="minor">
-            <a:schemeClr val="lt1"/>
-          </a:fontRef>
-        </p:style>
-        <p:txBody>
-          <a:bodyPr rtlCol="0" anchor="t" wrap="square" lIns="457200" tIns="365760"/>
-          <a:lstStyle/>
-          <a:p>
-            <a:pPr algn="ctr">
-              <a:spcAft>
-                <a:spcPts val="1400"/>
-              </a:spcAft>
-            </a:pPr>
-            <a:r>
-              <a:rPr sz="1800" b="0">
-                <a:solidFill>
-                  <a:srgbClr val="E5E9F0"/>
-                </a:solidFill>
-                <a:latin typeface="微软雅黑"/>
-              </a:rPr>
-              <a:t>·  【本页讲的是接入智联真实数据后的规划，不是已经做到的事】</a:t>
-            </a:r>
-          </a:p>
-          <a:p>
-            <a:pPr>
-              <a:spcAft>
-                <a:spcPts val="1400"/>
-              </a:spcAft>
-            </a:pPr>
-            <a:r>
-              <a:rPr sz="1800" b="0">
-                <a:solidFill>
-                  <a:srgbClr val="E5E9F0"/>
-                </a:solidFill>
-                <a:latin typeface="微软雅黑"/>
-              </a:rPr>
-              <a:t>·  现状 · 冷启动：约 300 个 HR Agent 的偏好完全由 LLM 先验知识驱动，尚未被任何一条真实招聘数据校准过</a:t>
-            </a:r>
-          </a:p>
-          <a:p>
-            <a:pPr>
-              <a:spcAft>
-                <a:spcPts val="1400"/>
-              </a:spcAft>
-            </a:pPr>
-            <a:r>
-              <a:rPr sz="1800" b="0">
-                <a:solidFill>
-                  <a:srgbClr val="E5E9F0"/>
-                </a:solidFill>
-                <a:latin typeface="微软雅黑"/>
-              </a:rPr>
-              <a:t>·  规划 · 接入数据后：用智联平台每日真实行为数据（已读不回 / 发起沟通 / 发放 offer）+ 强化学习持续校准 HR Agent</a:t>
-            </a:r>
-          </a:p>
-          <a:p>
-            <a:pPr>
-              <a:spcAft>
-                <a:spcPts val="1400"/>
-              </a:spcAft>
-            </a:pPr>
-            <a:r>
-              <a:rPr sz="1800" b="0">
-                <a:solidFill>
-                  <a:srgbClr val="E5E9F0"/>
-                </a:solidFill>
-                <a:latin typeface="微软雅黑"/>
-              </a:rPr>
-              <a:t>·  愿景：沙盘从孤立的模拟，升级为招聘市场的「实时数字孪生」</a:t>
-            </a:r>
-          </a:p>
-          <a:p>
-            <a:pPr>
-              <a:spcAft>
-                <a:spcPts val="1400"/>
-              </a:spcAft>
-            </a:pPr>
-            <a:r>
-              <a:rPr sz="1800" b="0">
-                <a:solidFill>
-                  <a:srgbClr val="E5E9F0"/>
-                </a:solidFill>
-                <a:latin typeface="微软雅黑"/>
-              </a:rPr>
-              <a:t>·  诚实边界：这一步没有回测数据支撑效果，讲的是方向而非成果——也是我们想促成与智联合作的原因</a:t>
-            </a:r>
-          </a:p>
-        </p:txBody>
-      </p:sp>
-    </p:spTree>
-  </p:cSld>
-  <p:clrMapOvr>
-    <a:masterClrMapping/>
-  </p:clrMapOvr>
-</p:sld>
-</file>
-
-<file path=ppt/slides/slide13.xml><?xml version="1.0" encoding="utf-8"?>
-<p:sld xmlns:a="http://schemas.openxmlformats.org/drawingml/2006/main" xmlns:p="http://schemas.openxmlformats.org/presentationml/2006/main" xmlns:r="http://schemas.openxmlformats.org/officeDocument/2006/relationships">
-  <p:cSld>
-    <p:bg>
-      <p:bgPr>
-        <a:solidFill>
-          <a:srgbClr val="0A0E1A"/>
-        </a:solidFill>
-        <a:effectLst/>
-      </p:bgPr>
-    </p:bg>
-    <p:spTree>
-      <p:nvGrpSpPr>
-        <p:cNvPr id="1" name=""/>
-        <p:cNvGrpSpPr/>
-        <p:nvPr/>
-      </p:nvGrpSpPr>
-      <p:grpSpPr/>
-      <p:sp>
-        <p:nvSpPr>
-          <p:cNvPr id="2" name="TextBox 1"/>
-          <p:cNvSpPr txBox="1"/>
-          <p:nvPr/>
-        </p:nvSpPr>
-        <p:spPr>
-          <a:xfrm>
-            <a:off x="822960" y="822960"/>
-            <a:ext cx="10515600" cy="914400"/>
-          </a:xfrm>
-          <a:prstGeom prst="rect">
-            <a:avLst/>
-          </a:prstGeom>
-          <a:noFill/>
-        </p:spPr>
-        <p:txBody>
-          <a:bodyPr wrap="square">
-            <a:spAutoFit/>
-          </a:bodyPr>
-          <a:lstStyle/>
-          <a:p>
-            <a:pPr algn="l"/>
-            <a:r>
-              <a:rPr sz="3200" b="1">
-                <a:solidFill>
-                  <a:srgbClr val="FBBF24"/>
-                </a:solidFill>
-                <a:latin typeface="微软雅黑"/>
-              </a:rPr>
-              <a:t>人力资本市场的量化回测沙盘</a:t>
-            </a:r>
-          </a:p>
-        </p:txBody>
-      </p:sp>
-      <p:sp>
-        <p:nvSpPr>
-          <p:cNvPr id="3" name="Rounded Rectangle 2"/>
-          <p:cNvSpPr/>
-          <p:nvPr/>
-        </p:nvSpPr>
-        <p:spPr>
-          <a:xfrm>
-            <a:off x="822960" y="2103120"/>
-            <a:ext cx="10515600" cy="3840480"/>
-          </a:xfrm>
-          <a:prstGeom prst="roundRect">
-            <a:avLst/>
-          </a:prstGeom>
-          <a:solidFill>
-            <a:srgbClr val="131829"/>
-          </a:solidFill>
-          <a:ln w="12700">
-            <a:solidFill>
-              <a:srgbClr val="22D3EE"/>
-            </a:solidFill>
-          </a:ln>
-          <a:effectLst/>
-        </p:spPr>
-        <p:style>
-          <a:lnRef idx="1">
-            <a:schemeClr val="accent1"/>
-          </a:lnRef>
-          <a:fillRef idx="3">
-            <a:schemeClr val="accent1"/>
-          </a:fillRef>
-          <a:effectRef idx="2">
-            <a:schemeClr val="accent1"/>
-          </a:effectRef>
-          <a:fontRef idx="minor">
-            <a:schemeClr val="lt1"/>
-          </a:fontRef>
-        </p:style>
-        <p:txBody>
-          <a:bodyPr rtlCol="0" anchor="t" wrap="square" lIns="457200" tIns="365760"/>
-          <a:lstStyle/>
-          <a:p>
-            <a:pPr algn="ctr">
-              <a:spcAft>
-                <a:spcPts val="1400"/>
-              </a:spcAft>
-            </a:pPr>
-            <a:r>
-              <a:rPr sz="1800" b="0">
-                <a:solidFill>
-                  <a:srgbClr val="E5E9F0"/>
-                </a:solidFill>
-                <a:latin typeface="微软雅黑"/>
-              </a:rPr>
-              <a:t>·  金融投资 10 万都先跑一万次回测；择业这种人生最大投资、企业几百万招聘成本却仍靠肉身试错</a:t>
-            </a:r>
-          </a:p>
-          <a:p>
-            <a:pPr>
-              <a:spcAft>
-                <a:spcPts val="1400"/>
-              </a:spcAft>
-            </a:pPr>
-            <a:r>
-              <a:rPr sz="1800" b="0">
-                <a:solidFill>
-                  <a:srgbClr val="E5E9F0"/>
-                </a:solidFill>
-                <a:latin typeface="微软雅黑"/>
-              </a:rPr>
-              <a:t>·  接入真实数据后，这里可以是招聘界的「彭博终端」：C 端职业生涯 GPS 卖确定性，B 端雇主品牌与薪酬动态定价沙盘（调薪前先跑一遍，看人才流失率变化，省下真实试错成本，想象空间最大）</a:t>
-            </a:r>
-          </a:p>
-          <a:p>
-            <a:pPr>
-              <a:spcAft>
-                <a:spcPts val="1400"/>
-              </a:spcAft>
-            </a:pPr>
-            <a:r>
-              <a:rPr sz="1800" b="0">
-                <a:solidFill>
-                  <a:srgbClr val="E5E9F0"/>
-                </a:solidFill>
-                <a:latin typeface="微软雅黑"/>
-              </a:rPr>
-              <a:t>·  我们判断高校可能最先跑通（有就业率 KPI + 预算），但这是待验证的假设，不是算好的账</a:t>
-            </a:r>
-          </a:p>
-          <a:p>
-            <a:pPr>
-              <a:spcAft>
-                <a:spcPts val="1400"/>
-              </a:spcAft>
-            </a:pPr>
-            <a:r>
-              <a:rPr sz="1800" b="0">
-                <a:solidFill>
-                  <a:srgbClr val="E5E9F0"/>
-                </a:solidFill>
-                <a:latin typeface="微软雅黑"/>
-              </a:rPr>
-              <a:t>·  早期该做的是找标杆校验证真实付费意愿、转起数据飞轮，而非纸面财务预测</a:t>
-            </a:r>
-          </a:p>
-        </p:txBody>
-      </p:sp>
-    </p:spTree>
-  </p:cSld>
-  <p:clrMapOvr>
-    <a:masterClrMapping/>
-  </p:clrMapOvr>
-</p:sld>
-</file>
-
-<file path=ppt/slides/slide14.xml><?xml version="1.0" encoding="utf-8"?>
-<p:sld xmlns:a="http://schemas.openxmlformats.org/drawingml/2006/main" xmlns:p="http://schemas.openxmlformats.org/presentationml/2006/main" xmlns:r="http://schemas.openxmlformats.org/officeDocument/2006/relationships">
-  <p:cSld>
-    <p:bg>
-      <p:bgPr>
-        <a:solidFill>
-          <a:srgbClr val="0A0E1A"/>
-        </a:solidFill>
-        <a:effectLst/>
-      </p:bgPr>
-    </p:bg>
-    <p:spTree>
-      <p:nvGrpSpPr>
-        <p:cNvPr id="1" name=""/>
-        <p:cNvGrpSpPr/>
-        <p:nvPr/>
-      </p:nvGrpSpPr>
-      <p:grpSpPr/>
-      <p:sp>
-        <p:nvSpPr>
-          <p:cNvPr id="2" name="TextBox 1"/>
-          <p:cNvSpPr txBox="1"/>
-          <p:nvPr/>
-        </p:nvSpPr>
-        <p:spPr>
-          <a:xfrm>
-            <a:off x="822960" y="822960"/>
-            <a:ext cx="10515600" cy="914400"/>
-          </a:xfrm>
-          <a:prstGeom prst="rect">
-            <a:avLst/>
-          </a:prstGeom>
-          <a:noFill/>
-        </p:spPr>
-        <p:txBody>
-          <a:bodyPr wrap="square">
-            <a:spAutoFit/>
-          </a:bodyPr>
-          <a:lstStyle/>
-          <a:p>
-            <a:pPr algn="l"/>
-            <a:r>
-              <a:rPr sz="3200" b="1">
-                <a:solidFill>
-                  <a:srgbClr val="A855F7"/>
-                </a:solidFill>
-                <a:latin typeface="微软雅黑"/>
-              </a:rPr>
-              <a:t>非科班单人 · 22 天 · AI 当队友</a:t>
-            </a:r>
-          </a:p>
-        </p:txBody>
-      </p:sp>
-      <p:sp>
-        <p:nvSpPr>
-          <p:cNvPr id="3" name="Rounded Rectangle 2"/>
-          <p:cNvSpPr/>
-          <p:nvPr/>
-        </p:nvSpPr>
-        <p:spPr>
-          <a:xfrm>
-            <a:off x="822960" y="2103120"/>
-            <a:ext cx="10515600" cy="3840480"/>
-          </a:xfrm>
-          <a:prstGeom prst="roundRect">
-            <a:avLst/>
-          </a:prstGeom>
-          <a:solidFill>
-            <a:srgbClr val="131829"/>
-          </a:solidFill>
-          <a:ln w="12700">
-            <a:solidFill>
-              <a:srgbClr val="22D3EE"/>
-            </a:solidFill>
-          </a:ln>
-          <a:effectLst/>
-        </p:spPr>
-        <p:style>
-          <a:lnRef idx="1">
-            <a:schemeClr val="accent1"/>
-          </a:lnRef>
-          <a:fillRef idx="3">
-            <a:schemeClr val="accent1"/>
-          </a:fillRef>
-          <a:effectRef idx="2">
-            <a:schemeClr val="accent1"/>
-          </a:effectRef>
-          <a:fontRef idx="minor">
-            <a:schemeClr val="lt1"/>
-          </a:fontRef>
-        </p:style>
-        <p:txBody>
-          <a:bodyPr rtlCol="0" anchor="t" wrap="square" lIns="457200" tIns="365760"/>
-          <a:lstStyle/>
-          <a:p>
-            <a:pPr algn="ctr">
-              <a:spcAft>
-                <a:spcPts val="1400"/>
-              </a:spcAft>
-            </a:pPr>
-            <a:r>
-              <a:rPr sz="1800" b="0">
-                <a:solidFill>
-                  <a:srgbClr val="E5E9F0"/>
-                </a:solidFill>
-                <a:latin typeface="微软雅黑"/>
-              </a:rPr>
-              <a:t>·  创作者 tljcpa：机械原理跨考考研中，非计算机科班</a:t>
-            </a:r>
-          </a:p>
-          <a:p>
-            <a:pPr>
-              <a:spcAft>
-                <a:spcPts val="1400"/>
-              </a:spcAft>
-            </a:pPr>
-            <a:r>
-              <a:rPr sz="1800" b="0">
-                <a:solidFill>
-                  <a:srgbClr val="E5E9F0"/>
-                </a:solidFill>
-                <a:latin typeface="微软雅黑"/>
-              </a:rPr>
-              <a:t>·  AI（Claude Code）做工程实现，核心创意 / 产品方向 / 架构决策由本人主导</a:t>
-            </a:r>
-          </a:p>
-          <a:p>
-            <a:pPr>
-              <a:spcAft>
-                <a:spcPts val="1400"/>
-              </a:spcAft>
-            </a:pPr>
-            <a:r>
-              <a:rPr sz="1800" b="0">
-                <a:solidFill>
-                  <a:srgbClr val="E5E9F0"/>
-                </a:solidFill>
-                <a:latin typeface="微软雅黑"/>
-              </a:rPr>
-              <a:t>·  落地证据：真实录屏演示 + 开源代码（可本地部署）+ 线上可访问 demo</a:t>
-            </a:r>
-          </a:p>
-        </p:txBody>
-      </p:sp>
-    </p:spTree>
-  </p:cSld>
-  <p:clrMapOvr>
-    <a:masterClrMapping/>
-  </p:clrMapOvr>
-</p:sld>
-</file>
-
-<file path=ppt/slides/slide15.xml><?xml version="1.0" encoding="utf-8"?>
-<p:sld xmlns:a="http://schemas.openxmlformats.org/drawingml/2006/main" xmlns:p="http://schemas.openxmlformats.org/presentationml/2006/main" xmlns:r="http://schemas.openxmlformats.org/officeDocument/2006/relationships">
-  <p:cSld>
-    <p:bg>
-      <p:bgPr>
-        <a:solidFill>
-          <a:srgbClr val="0A0E1A"/>
-        </a:solidFill>
-        <a:effectLst/>
-      </p:bgPr>
-    </p:bg>
-    <p:spTree>
-      <p:nvGrpSpPr>
-        <p:cNvPr id="1" name=""/>
-        <p:cNvGrpSpPr/>
-        <p:nvPr/>
-      </p:nvGrpSpPr>
-      <p:grpSpPr/>
-      <p:sp>
-        <p:nvSpPr>
-          <p:cNvPr id="2" name="TextBox 1"/>
-          <p:cNvSpPr txBox="1"/>
-          <p:nvPr/>
-        </p:nvSpPr>
-        <p:spPr>
-          <a:xfrm>
-            <a:off x="914400" y="2011680"/>
-            <a:ext cx="10332720" cy="1097280"/>
-          </a:xfrm>
-          <a:prstGeom prst="rect">
-            <a:avLst/>
-          </a:prstGeom>
-          <a:noFill/>
-        </p:spPr>
-        <p:txBody>
-          <a:bodyPr wrap="square">
-            <a:spAutoFit/>
-          </a:bodyPr>
-          <a:lstStyle/>
-          <a:p>
-            <a:pPr algn="ctr"/>
-            <a:r>
-              <a:rPr sz="3400" b="1">
-                <a:solidFill>
-                  <a:srgbClr val="E5E9F0"/>
-                </a:solidFill>
-                <a:latin typeface="微软雅黑"/>
-              </a:rPr>
-              <a:t>求职不该是一场只有一次的赌博</a:t>
-            </a:r>
-          </a:p>
-        </p:txBody>
-      </p:sp>
-      <p:sp>
-        <p:nvSpPr>
-          <p:cNvPr id="3" name="TextBox 2"/>
-          <p:cNvSpPr txBox="1"/>
-          <p:nvPr/>
-        </p:nvSpPr>
-        <p:spPr>
-          <a:xfrm>
-            <a:off x="914400" y="3200400"/>
-            <a:ext cx="10332720" cy="640080"/>
-          </a:xfrm>
-          <a:prstGeom prst="rect">
-            <a:avLst/>
-          </a:prstGeom>
-          <a:noFill/>
-        </p:spPr>
-        <p:txBody>
-          <a:bodyPr wrap="square">
-            <a:spAutoFit/>
-          </a:bodyPr>
-          <a:lstStyle/>
-          <a:p>
-            <a:pPr algn="ctr"/>
-            <a:r>
-              <a:rPr sz="2000" b="0">
-                <a:solidFill>
-                  <a:srgbClr val="22D3EE"/>
-                </a:solidFill>
-                <a:latin typeface="微软雅黑"/>
-              </a:rPr>
-              <a:t>让人才市场——先实验，再决策；不要用你唯一真实的人生去试错</a:t>
-            </a:r>
-          </a:p>
-        </p:txBody>
-      </p:sp>
-      <p:pic>
-        <p:nvPicPr>
-          <p:cNvPr id="4" name="Picture 3" descr="demo-二维码-multiverse.png"/>
-          <p:cNvPicPr>
-            <a:picLocks noChangeAspect="1"/>
-          </p:cNvPicPr>
-          <p:nvPr/>
-        </p:nvPicPr>
-        <p:blipFill>
-          <a:blip r:embed="rId2"/>
-          <a:stretch>
-            <a:fillRect/>
-          </a:stretch>
-        </p:blipFill>
-        <p:spPr>
-          <a:xfrm>
-            <a:off x="5272887" y="4114800"/>
-            <a:ext cx="1645920" cy="1645920"/>
-          </a:xfrm>
-          <a:prstGeom prst="rect">
-            <a:avLst/>
-          </a:prstGeom>
-        </p:spPr>
-      </p:pic>
-      <p:sp>
-        <p:nvSpPr>
-          <p:cNvPr id="5" name="TextBox 4"/>
-          <p:cNvSpPr txBox="1"/>
-          <p:nvPr/>
-        </p:nvSpPr>
-        <p:spPr>
-          <a:xfrm>
-            <a:off x="914400" y="5852160"/>
-            <a:ext cx="10332720" cy="457200"/>
-          </a:xfrm>
-          <a:prstGeom prst="rect">
-            <a:avLst/>
-          </a:prstGeom>
-          <a:noFill/>
-        </p:spPr>
-        <p:txBody>
-          <a:bodyPr wrap="square">
-            <a:spAutoFit/>
-          </a:bodyPr>
-          <a:lstStyle/>
-          <a:p>
-            <a:pPr algn="ctr"/>
-            <a:r>
-              <a:rPr sz="1300" b="0">
-                <a:solidFill>
-                  <a:srgbClr val="8B93A7"/>
-                </a:solidFill>
-                <a:latin typeface="微软雅黑"/>
-              </a:rPr>
-              <a:t>扫码体验 multiverse.zdwktlj.top  ·  github.com/tljcpa/career-multiverse</a:t>
+      <p:sp>
+        <p:nvSpPr>
+          <p:cNvPr id="2" name="Title 1"/>
+          <p:cNvSpPr>
+            <a:spLocks noGrp="1"/>
+          </p:cNvSpPr>
+          <p:nvPr>
+            <p:ph type="title"/>
+          </p:nvPr>
+        </p:nvSpPr>
+        <p:spPr/>
+        <p:txBody>
+          <a:bodyPr/>
+          <a:lstStyle/>
+          <a:p>
+            <a:r>
+              <a:t>团队与未来展望</a:t>
+            </a:r>
+          </a:p>
+        </p:txBody>
+      </p:sp>
+      <p:sp>
+        <p:nvSpPr>
+          <p:cNvPr id="3" name="Content Placeholder 2"/>
+          <p:cNvSpPr>
+            <a:spLocks noGrp="1"/>
+          </p:cNvSpPr>
+          <p:nvPr>
+            <p:ph idx="1"/>
+          </p:nvPr>
+        </p:nvSpPr>
+        <p:spPr/>
+        <p:txBody>
+          <a:bodyPr/>
+          <a:lstStyle/>
+          <a:p>
+            <a:r>
+              <a:t>团队构成：</a:t>
+            </a:r>
+          </a:p>
+          <a:p>
+            <a:r>
+              <a:t> - tljcpa (跨考非科班学生)</a:t>
+            </a:r>
+          </a:p>
+          <a:p>
+            <a:r>
+              <a:t> - Claude Code (AI 辅助结对)</a:t>
+            </a:r>
+          </a:p>
+          <a:p>
+            <a:r>
+              <a:t> - 这是AI赋能下，1个人+AI完成完整产品开发的真实样本</a:t>
+            </a:r>
+          </a:p>
+          <a:p/>
+          <a:p>
+            <a:r>
+              <a:t>未来诉求：</a:t>
+            </a:r>
+          </a:p>
+          <a:p>
+            <a:r>
+              <a:t> - 期望加入智联生态合作</a:t>
+            </a:r>
+          </a:p>
+          <a:p>
+            <a:r>
+              <a:t> - 寻求种子轮投资（100-200万）</a:t>
+            </a:r>
+          </a:p>
+          <a:p>
+            <a:r>
+              <a:t> - 校园渠道推广与公开数据合作</a:t>
             </a:r>
           </a:p>
         </p:txBody>
@@ -4038,14 +3267,6 @@
 <file path=ppt/slides/slide2.xml><?xml version="1.0" encoding="utf-8"?>
 <p:sld xmlns:a="http://schemas.openxmlformats.org/drawingml/2006/main" xmlns:p="http://schemas.openxmlformats.org/presentationml/2006/main" xmlns:r="http://schemas.openxmlformats.org/officeDocument/2006/relationships">
   <p:cSld>
-    <p:bg>
-      <p:bgPr>
-        <a:solidFill>
-          <a:srgbClr val="0A0E1A"/>
-        </a:solidFill>
-        <a:effectLst/>
-      </p:bgPr>
-    </p:bg>
     <p:spTree>
       <p:nvGrpSpPr>
         <p:cNvPr id="1" name=""/>
@@ -4053,30 +3274,70 @@
         <p:nvPr/>
       </p:nvGrpSpPr>
       <p:grpSpPr/>
-      <p:pic>
-        <p:nvPicPr>
-          <p:cNvPr id="2" name="Picture 1" descr="design_problem.png"/>
-          <p:cNvPicPr>
-            <a:picLocks noChangeAspect="1"/>
-          </p:cNvPicPr>
-          <p:nvPr/>
-        </p:nvPicPr>
-        <p:blipFill>
-          <a:blip r:embed="rId2"/>
-          <a:stretch>
-            <a:fillRect/>
-          </a:stretch>
-        </p:blipFill>
-        <p:spPr>
-          <a:xfrm>
-            <a:off x="0" y="0"/>
-            <a:ext cx="12191695" cy="6858000"/>
-          </a:xfrm>
-          <a:prstGeom prst="rect">
-            <a:avLst/>
-          </a:prstGeom>
-        </p:spPr>
-      </p:pic>
+      <p:sp>
+        <p:nvSpPr>
+          <p:cNvPr id="2" name="Title 1"/>
+          <p:cNvSpPr>
+            <a:spLocks noGrp="1"/>
+          </p:cNvSpPr>
+          <p:nvPr>
+            <p:ph type="title"/>
+          </p:nvPr>
+        </p:nvSpPr>
+        <p:spPr/>
+        <p:txBody>
+          <a:bodyPr/>
+          <a:lstStyle/>
+          <a:p>
+            <a:r>
+              <a:t>应届生求职的真问题：三个看不见</a:t>
+            </a:r>
+          </a:p>
+        </p:txBody>
+      </p:sp>
+      <p:sp>
+        <p:nvSpPr>
+          <p:cNvPr id="3" name="Content Placeholder 2"/>
+          <p:cNvSpPr>
+            <a:spLocks noGrp="1"/>
+          </p:cNvSpPr>
+          <p:nvPr>
+            <p:ph idx="1"/>
+          </p:nvPr>
+        </p:nvSpPr>
+        <p:spPr/>
+        <p:txBody>
+          <a:bodyPr/>
+          <a:lstStyle/>
+          <a:p>
+            <a:r>
+              <a:t>每年1158万应届生，人均投递60+简历，70%没有回音。</a:t>
+            </a:r>
+          </a:p>
+          <a:p/>
+          <a:p>
+            <a:r>
+              <a:t>1. 看不见 HR 的真实评价：淘汰理由不透明</a:t>
+            </a:r>
+          </a:p>
+          <a:p>
+            <a:r>
+              <a:t>2. 看不见 公司的隐性门槛：实际门槛远高于JD</a:t>
+            </a:r>
+          </a:p>
+          <a:p>
+            <a:r>
+              <a:t>3. 看不见 决策的后悔成本：反事实无法验证</a:t>
+            </a:r>
+          </a:p>
+          <a:p/>
+          <a:p>
+            <a:r>
+              <a:t>现状：人才市场至今只能凭经验决策，缺一个“先实验、再决策”的地方。</a:t>
+            </a:r>
+          </a:p>
+        </p:txBody>
+      </p:sp>
     </p:spTree>
   </p:cSld>
   <p:clrMapOvr>
@@ -4088,14 +3349,6 @@
 <file path=ppt/slides/slide3.xml><?xml version="1.0" encoding="utf-8"?>
 <p:sld xmlns:a="http://schemas.openxmlformats.org/drawingml/2006/main" xmlns:p="http://schemas.openxmlformats.org/presentationml/2006/main" xmlns:r="http://schemas.openxmlformats.org/officeDocument/2006/relationships">
   <p:cSld>
-    <p:bg>
-      <p:bgPr>
-        <a:solidFill>
-          <a:srgbClr val="0A0E1A"/>
-        </a:solidFill>
-        <a:effectLst/>
-      </p:bgPr>
-    </p:bg>
     <p:spTree>
       <p:nvGrpSpPr>
         <p:cNvPr id="1" name=""/>
@@ -4105,94 +3358,82 @@
       <p:grpSpPr/>
       <p:sp>
         <p:nvSpPr>
-          <p:cNvPr id="2" name="TextBox 1"/>
-          <p:cNvSpPr txBox="1"/>
-          <p:nvPr/>
-        </p:nvSpPr>
-        <p:spPr>
-          <a:xfrm>
-            <a:off x="548640" y="320040"/>
-            <a:ext cx="10972800" cy="731520"/>
-          </a:xfrm>
-          <a:prstGeom prst="rect">
-            <a:avLst/>
-          </a:prstGeom>
-          <a:noFill/>
-        </p:spPr>
-        <p:txBody>
-          <a:bodyPr wrap="square">
-            <a:spAutoFit/>
-          </a:bodyPr>
-          <a:lstStyle/>
-          <a:p>
-            <a:pPr algn="l"/>
-            <a:r>
-              <a:rPr sz="2600" b="1">
-                <a:solidFill>
-                  <a:srgbClr val="22D3EE"/>
-                </a:solidFill>
-                <a:latin typeface="微软雅黑"/>
-              </a:rPr>
-              <a:t>把整个春招反复推演，用统计结论替代单次赌博</a:t>
-            </a:r>
-          </a:p>
-        </p:txBody>
-      </p:sp>
-      <p:pic>
-        <p:nvPicPr>
-          <p:cNvPr id="3" name="Picture 2" descr="report.png"/>
-          <p:cNvPicPr>
-            <a:picLocks noChangeAspect="1"/>
-          </p:cNvPicPr>
-          <p:nvPr/>
-        </p:nvPicPr>
-        <p:blipFill>
-          <a:blip r:embed="rId2"/>
-          <a:stretch>
-            <a:fillRect/>
-          </a:stretch>
-        </p:blipFill>
-        <p:spPr>
-          <a:xfrm>
-            <a:off x="1249527" y="1143000"/>
-            <a:ext cx="9692640" cy="5449824"/>
-          </a:xfrm>
-          <a:prstGeom prst="rect">
-            <a:avLst/>
-          </a:prstGeom>
-        </p:spPr>
-      </p:pic>
-      <p:sp>
-        <p:nvSpPr>
-          <p:cNvPr id="4" name="TextBox 3"/>
-          <p:cNvSpPr txBox="1"/>
-          <p:nvPr/>
-        </p:nvSpPr>
-        <p:spPr>
-          <a:xfrm>
-            <a:off x="548640" y="6400800"/>
-            <a:ext cx="10972800" cy="365760"/>
-          </a:xfrm>
-          <a:prstGeom prst="rect">
-            <a:avLst/>
-          </a:prstGeom>
-          <a:noFill/>
-        </p:spPr>
-        <p:txBody>
-          <a:bodyPr wrap="square">
-            <a:spAutoFit/>
-          </a:bodyPr>
-          <a:lstStyle/>
-          <a:p>
-            <a:pPr algn="l"/>
-            <a:r>
-              <a:rPr sz="1300" b="0">
-                <a:solidFill>
-                  <a:srgbClr val="8B93A7"/>
-                </a:solidFill>
-                <a:latin typeface="微软雅黑"/>
-              </a:rPr>
-              <a:t>offer 率 98.4% / 平均 5.3 offer / 中位薪资 53 万 / 第 10 周落定 / 去向分散在声剧-γ·鲸火-1·云枢等 8+ 家——基于数十次真实模拟的统计结论，引擎可放大到全量真实市场</a:t>
+          <p:cNvPr id="2" name="Title 1"/>
+          <p:cNvSpPr>
+            <a:spLocks noGrp="1"/>
+          </p:cNvSpPr>
+          <p:nvPr>
+            <p:ph type="title"/>
+          </p:nvPr>
+        </p:nvSpPr>
+        <p:spPr/>
+        <p:txBody>
+          <a:bodyPr/>
+          <a:lstStyle/>
+          <a:p>
+            <a:r>
+              <a:t>解决方案：把整个春招“虚拟跑一遍”</a:t>
+            </a:r>
+          </a:p>
+        </p:txBody>
+      </p:sp>
+      <p:sp>
+        <p:nvSpPr>
+          <p:cNvPr id="3" name="Content Placeholder 2"/>
+          <p:cNvSpPr>
+            <a:spLocks noGrp="1"/>
+          </p:cNvSpPr>
+          <p:nvPr>
+            <p:ph idx="1"/>
+          </p:nvPr>
+        </p:nvSpPr>
+        <p:spPr/>
+        <p:txBody>
+          <a:bodyPr/>
+          <a:lstStyle/>
+          <a:p>
+            <a:r>
+              <a:t>1. 上传真实简历 + GitHub + Blog</a:t>
+            </a:r>
+          </a:p>
+          <a:p>
+            <a:r>
+              <a:t>2. LLM 一次性多任务评估（五维画像评分+学校学历档加成）</a:t>
+            </a:r>
+          </a:p>
+          <a:p>
+            <a:r>
+              <a:t>3. 数字分身进入 3D 沙盘宇宙</a:t>
+            </a:r>
+          </a:p>
+          <a:p>
+            <a:r>
+              <a:t>   - 49家公司独立 HR Agent + 200名竞争者</a:t>
+            </a:r>
+          </a:p>
+          <a:p>
+            <a:r>
+              <a:t>   - 蒙特卡洛扩展跑完 1000 次平行春招</a:t>
+            </a:r>
+          </a:p>
+          <a:p>
+            <a:r>
+              <a:t>4. 输出预演结果：</a:t>
+            </a:r>
+          </a:p>
+          <a:p>
+            <a:r>
+              <a:t>   - 1000次平行宇宙的KPI统计（offer率、去向分布）</a:t>
+            </a:r>
+          </a:p>
+          <a:p>
+            <a:r>
+              <a:t>   - 反事实预演（如果改XX，结局如何变化）</a:t>
+            </a:r>
+          </a:p>
+          <a:p>
+            <a:r>
+              <a:t>   - AI教练个性化可执行建议</a:t>
             </a:r>
           </a:p>
         </p:txBody>
@@ -4208,14 +3449,6 @@
 <file path=ppt/slides/slide4.xml><?xml version="1.0" encoding="utf-8"?>
 <p:sld xmlns:a="http://schemas.openxmlformats.org/drawingml/2006/main" xmlns:p="http://schemas.openxmlformats.org/presentationml/2006/main" xmlns:r="http://schemas.openxmlformats.org/officeDocument/2006/relationships">
   <p:cSld>
-    <p:bg>
-      <p:bgPr>
-        <a:solidFill>
-          <a:srgbClr val="0A0E1A"/>
-        </a:solidFill>
-        <a:effectLst/>
-      </p:bgPr>
-    </p:bg>
     <p:spTree>
       <p:nvGrpSpPr>
         <p:cNvPr id="1" name=""/>
@@ -4225,142 +3458,58 @@
       <p:grpSpPr/>
       <p:sp>
         <p:nvSpPr>
-          <p:cNvPr id="2" name="TextBox 1"/>
-          <p:cNvSpPr txBox="1"/>
-          <p:nvPr/>
-        </p:nvSpPr>
-        <p:spPr>
-          <a:xfrm>
-            <a:off x="822960" y="822960"/>
-            <a:ext cx="10515600" cy="914400"/>
-          </a:xfrm>
-          <a:prstGeom prst="rect">
-            <a:avLst/>
-          </a:prstGeom>
-          <a:noFill/>
-        </p:spPr>
-        <p:txBody>
-          <a:bodyPr wrap="square">
-            <a:spAutoFit/>
-          </a:bodyPr>
-          <a:lstStyle/>
-          <a:p>
-            <a:pPr algn="l"/>
-            <a:r>
-              <a:rPr sz="3200" b="1">
-                <a:solidFill>
-                  <a:srgbClr val="22D3EE"/>
-                </a:solidFill>
-                <a:latin typeface="微软雅黑"/>
-              </a:rPr>
-              <a:t>从预测未来，到实验未来</a:t>
-            </a:r>
-          </a:p>
-        </p:txBody>
-      </p:sp>
-      <p:sp>
-        <p:nvSpPr>
-          <p:cNvPr id="3" name="Rounded Rectangle 2"/>
-          <p:cNvSpPr/>
-          <p:nvPr/>
-        </p:nvSpPr>
-        <p:spPr>
-          <a:xfrm>
-            <a:off x="822960" y="2103120"/>
-            <a:ext cx="10515600" cy="3840480"/>
-          </a:xfrm>
-          <a:prstGeom prst="roundRect">
-            <a:avLst/>
-          </a:prstGeom>
-          <a:solidFill>
-            <a:srgbClr val="131829"/>
-          </a:solidFill>
-          <a:ln w="12700">
-            <a:solidFill>
-              <a:srgbClr val="22D3EE"/>
-            </a:solidFill>
-          </a:ln>
-          <a:effectLst/>
-        </p:spPr>
-        <p:style>
-          <a:lnRef idx="1">
-            <a:schemeClr val="accent1"/>
-          </a:lnRef>
-          <a:fillRef idx="3">
-            <a:schemeClr val="accent1"/>
-          </a:fillRef>
-          <a:effectRef idx="2">
-            <a:schemeClr val="accent1"/>
-          </a:effectRef>
-          <a:fontRef idx="minor">
-            <a:schemeClr val="lt1"/>
-          </a:fontRef>
-        </p:style>
-        <p:txBody>
-          <a:bodyPr rtlCol="0" anchor="t" wrap="square" lIns="457200" tIns="365760"/>
-          <a:lstStyle/>
-          <a:p>
-            <a:pPr algn="ctr">
-              <a:spcAft>
-                <a:spcPts val="1400"/>
-              </a:spcAft>
-            </a:pPr>
-            <a:r>
-              <a:rPr sz="1800" b="0">
-                <a:solidFill>
-                  <a:srgbClr val="E5E9F0"/>
-                </a:solidFill>
-                <a:latin typeface="微软雅黑"/>
-              </a:rPr>
-              <a:t>·  现有 AI 求职工具：当前数据 → 一个预测结果（简历改词 / 面试外挂 / 词袋匹配）</a:t>
-            </a:r>
-          </a:p>
-          <a:p>
-            <a:pPr>
-              <a:spcAft>
-                <a:spcPts val="1400"/>
-              </a:spcAft>
-            </a:pPr>
-            <a:r>
-              <a:rPr sz="1800" b="0">
-                <a:solidFill>
-                  <a:srgbClr val="E5E9F0"/>
-                </a:solidFill>
-                <a:latin typeface="微软雅黑"/>
-              </a:rPr>
-              <a:t>·  我们：当前状态 → 构建虚拟市场 → 观察演化 → 反事实分析</a:t>
-            </a:r>
-          </a:p>
-          <a:p>
-            <a:pPr>
-              <a:spcAft>
-                <a:spcPts val="1400"/>
-              </a:spcAft>
-            </a:pPr>
-            <a:r>
-              <a:rPr sz="1800" b="0">
-                <a:solidFill>
-                  <a:srgbClr val="E5E9F0"/>
-                </a:solidFill>
-                <a:latin typeface="微软雅黑"/>
-              </a:rPr>
-              <a:t>·  从推荐系统到模拟系统的跃迁——改变一个条件，看结局怎么变</a:t>
-            </a:r>
-          </a:p>
-          <a:p>
-            <a:pPr>
-              <a:spcAft>
-                <a:spcPts val="1400"/>
-              </a:spcAft>
-            </a:pPr>
-            <a:r>
-              <a:rPr sz="1800" b="0">
-                <a:solidFill>
-                  <a:srgbClr val="E5E9F0"/>
-                </a:solidFill>
-                <a:latin typeface="微软雅黑"/>
-              </a:rPr>
-              <a:t>·  身位差：别人打磨更快的镰刀，我们造气候模拟器——工具改变效率，只有沙盘能改变战略</a:t>
+          <p:cNvPr id="2" name="Title 1"/>
+          <p:cNvSpPr>
+            <a:spLocks noGrp="1"/>
+          </p:cNvSpPr>
+          <p:nvPr>
+            <p:ph type="title"/>
+          </p:nvPr>
+        </p:nvSpPr>
+        <p:spPr/>
+        <p:txBody>
+          <a:bodyPr/>
+          <a:lstStyle/>
+          <a:p>
+            <a:r>
+              <a:t>三个核心反转</a:t>
+            </a:r>
+          </a:p>
+        </p:txBody>
+      </p:sp>
+      <p:sp>
+        <p:nvSpPr>
+          <p:cNvPr id="3" name="Content Placeholder 2"/>
+          <p:cNvSpPr>
+            <a:spLocks noGrp="1"/>
+          </p:cNvSpPr>
+          <p:nvPr>
+            <p:ph idx="1"/>
+          </p:nvPr>
+        </p:nvSpPr>
+        <p:spPr/>
+        <p:txBody>
+          <a:bodyPr/>
+          <a:lstStyle/>
+          <a:p>
+            <a:r>
+              <a:t>1. 结构反转：把一次性的投递赌博，变成可重复的1000次完整春招预演</a:t>
+            </a:r>
+          </a:p>
+          <a:p>
+            <a:r>
+              <a:t>2. 载体反转：从静态PDF简历，变成可交互面试的“数字分身”</a:t>
+            </a:r>
+          </a:p>
+          <a:p>
+            <a:r>
+              <a:t>3. 决策反转：不是含糊地“建议你怎么做”，而是直接展示不同选择在1000次模拟中的“统计结果”</a:t>
+            </a:r>
+          </a:p>
+          <a:p/>
+          <a:p>
+            <a:r>
+              <a:t>竞品都在局部优化，我们在重新定义市场结构。</a:t>
             </a:r>
           </a:p>
         </p:txBody>
@@ -4376,14 +3525,6 @@
 <file path=ppt/slides/slide5.xml><?xml version="1.0" encoding="utf-8"?>
 <p:sld xmlns:a="http://schemas.openxmlformats.org/drawingml/2006/main" xmlns:p="http://schemas.openxmlformats.org/presentationml/2006/main" xmlns:r="http://schemas.openxmlformats.org/officeDocument/2006/relationships">
   <p:cSld>
-    <p:bg>
-      <p:bgPr>
-        <a:solidFill>
-          <a:srgbClr val="0A0E1A"/>
-        </a:solidFill>
-        <a:effectLst/>
-      </p:bgPr>
-    </p:bg>
     <p:spTree>
       <p:nvGrpSpPr>
         <p:cNvPr id="1" name=""/>
@@ -4391,30 +3532,90 @@
         <p:nvPr/>
       </p:nvGrpSpPr>
       <p:grpSpPr/>
-      <p:pic>
-        <p:nvPicPr>
-          <p:cNvPr id="2" name="Picture 1" descr="design_threelayer.png"/>
-          <p:cNvPicPr>
-            <a:picLocks noChangeAspect="1"/>
-          </p:cNvPicPr>
-          <p:nvPr/>
-        </p:nvPicPr>
-        <p:blipFill>
-          <a:blip r:embed="rId2"/>
-          <a:stretch>
-            <a:fillRect/>
-          </a:stretch>
-        </p:blipFill>
-        <p:spPr>
-          <a:xfrm>
-            <a:off x="0" y="0"/>
-            <a:ext cx="12191695" cy="6858000"/>
-          </a:xfrm>
-          <a:prstGeom prst="rect">
-            <a:avLst/>
-          </a:prstGeom>
-        </p:spPr>
-      </p:pic>
+      <p:sp>
+        <p:nvSpPr>
+          <p:cNvPr id="2" name="Title 1"/>
+          <p:cNvSpPr>
+            <a:spLocks noGrp="1"/>
+          </p:cNvSpPr>
+          <p:nvPr>
+            <p:ph type="title"/>
+          </p:nvPr>
+        </p:nvSpPr>
+        <p:spPr/>
+        <p:txBody>
+          <a:bodyPr/>
+          <a:lstStyle/>
+          <a:p>
+            <a:r>
+              <a:t>绝境案例：一位宝妈的真实推演（真数据·未美化）</a:t>
+            </a:r>
+          </a:p>
+        </p:txBody>
+      </p:sp>
+      <p:sp>
+        <p:nvSpPr>
+          <p:cNvPr id="3" name="Content Placeholder 2"/>
+          <p:cNvSpPr>
+            <a:spLocks noGrp="1"/>
+          </p:cNvSpPr>
+          <p:nvPr>
+            <p:ph idx="1"/>
+          </p:nvPr>
+        </p:nvSpPr>
+        <p:spPr/>
+        <p:txBody>
+          <a:bodyPr/>
+          <a:lstStyle/>
+          <a:p>
+            <a:r>
+              <a:t>画像：28岁 / 文科本科 / 2年全职带娃空窗 / 目标项目管理</a:t>
+            </a:r>
+          </a:p>
+          <a:p>
+            <a:r>
+              <a:t>在约300家公司市场里，每档各真跑8次（共24次真实LLM沙盘）：</a:t>
+            </a:r>
+          </a:p>
+          <a:p/>
+          <a:p>
+            <a:r>
+              <a:t>① 残酷现实（原始）：平均投52份 → 0面试 · 0 offer（8/8全军覆没）</a:t>
+            </a:r>
+          </a:p>
+          <a:p>
+            <a:r>
+              <a:t>② 只改包装（带娃重构为多线程+主攻创业公司+薪资-10%）：仍 0 offer（8/8）</a:t>
+            </a:r>
+          </a:p>
+          <a:p>
+            <a:r>
+              <a:t>③ 真补硬实力（PMP拿证+两个真实项目，含金量25→50）：本赛道仍 0 offer（8/8）</a:t>
+            </a:r>
+          </a:p>
+          <a:p/>
+          <a:p>
+            <a:r>
+              <a:t>沙盘诚实的结论：她的瓶颈不是简历不够漂亮，是赛道错配——</a:t>
+            </a:r>
+          </a:p>
+          <a:p>
+            <a:r>
+              <a:t>该市场约2/3岗位以技术岗打头、平均门槛≈80、超半数要求硕士，她根本够不着。</a:t>
+            </a:r>
+          </a:p>
+          <a:p>
+            <a:r>
+              <a:t>真正的“后悔药”是趁早换一条能上桌的赛道，而非优化措辞。</a:t>
+            </a:r>
+          </a:p>
+          <a:p>
+            <a:r>
+              <a:t>（数字全部真跑得到，结果就是“没翻盘”，如实呈现——诚实是产品立身之本）</a:t>
+            </a:r>
+          </a:p>
+        </p:txBody>
+      </p:sp>
     </p:spTree>
   </p:cSld>
   <p:clrMapOvr>
@@ -4426,14 +3627,6 @@
 <file path=ppt/slides/slide6.xml><?xml version="1.0" encoding="utf-8"?>
 <p:sld xmlns:a="http://schemas.openxmlformats.org/drawingml/2006/main" xmlns:p="http://schemas.openxmlformats.org/presentationml/2006/main" xmlns:r="http://schemas.openxmlformats.org/officeDocument/2006/relationships">
   <p:cSld>
-    <p:bg>
-      <p:bgPr>
-        <a:solidFill>
-          <a:srgbClr val="0A0E1A"/>
-        </a:solidFill>
-        <a:effectLst/>
-      </p:bgPr>
-    </p:bg>
     <p:spTree>
       <p:nvGrpSpPr>
         <p:cNvPr id="1" name=""/>
@@ -4443,94 +3636,72 @@
       <p:grpSpPr/>
       <p:sp>
         <p:nvSpPr>
-          <p:cNvPr id="2" name="TextBox 1"/>
-          <p:cNvSpPr txBox="1"/>
-          <p:nvPr/>
-        </p:nvSpPr>
-        <p:spPr>
-          <a:xfrm>
-            <a:off x="548640" y="320040"/>
-            <a:ext cx="10972800" cy="731520"/>
-          </a:xfrm>
-          <a:prstGeom prst="rect">
-            <a:avLst/>
-          </a:prstGeom>
-          <a:noFill/>
-        </p:spPr>
-        <p:txBody>
-          <a:bodyPr wrap="square">
-            <a:spAutoFit/>
-          </a:bodyPr>
-          <a:lstStyle/>
-          <a:p>
-            <a:pPr algn="l"/>
-            <a:r>
-              <a:rPr sz="2600" b="1">
-                <a:solidFill>
-                  <a:srgbClr val="22D3EE"/>
-                </a:solidFill>
-                <a:latin typeface="微软雅黑"/>
-              </a:rPr>
-              <a:t>LLM 五维画像评估，透明不黑盒</a:t>
-            </a:r>
-          </a:p>
-        </p:txBody>
-      </p:sp>
-      <p:pic>
-        <p:nvPicPr>
-          <p:cNvPr id="3" name="Picture 2" descr="profile.png"/>
-          <p:cNvPicPr>
-            <a:picLocks noChangeAspect="1"/>
-          </p:cNvPicPr>
-          <p:nvPr/>
-        </p:nvPicPr>
-        <p:blipFill>
-          <a:blip r:embed="rId2"/>
-          <a:stretch>
-            <a:fillRect/>
-          </a:stretch>
-        </p:blipFill>
-        <p:spPr>
-          <a:xfrm>
-            <a:off x="1249527" y="1143000"/>
-            <a:ext cx="9692640" cy="5449824"/>
-          </a:xfrm>
-          <a:prstGeom prst="rect">
-            <a:avLst/>
-          </a:prstGeom>
-        </p:spPr>
-      </p:pic>
-      <p:sp>
-        <p:nvSpPr>
-          <p:cNvPr id="4" name="TextBox 3"/>
-          <p:cNvSpPr txBox="1"/>
-          <p:nvPr/>
-        </p:nvSpPr>
-        <p:spPr>
-          <a:xfrm>
-            <a:off x="548640" y="6400800"/>
-            <a:ext cx="10972800" cy="365760"/>
-          </a:xfrm>
-          <a:prstGeom prst="rect">
-            <a:avLst/>
-          </a:prstGeom>
-          <a:noFill/>
-        </p:spPr>
-        <p:txBody>
-          <a:bodyPr wrap="square">
-            <a:spAutoFit/>
-          </a:bodyPr>
-          <a:lstStyle/>
-          <a:p>
-            <a:pPr algn="l"/>
-            <a:r>
-              <a:rPr sz="1300" b="0">
-                <a:solidFill>
-                  <a:srgbClr val="8B93A7"/>
-                </a:solidFill>
-                <a:latin typeface="微软雅黑"/>
-              </a:rPr>
-              <a:t>每维附评分理由（引用简历证据）+ 学校档 / 学历档双维度加成，综合分可展开</a:t>
+          <p:cNvPr id="2" name="Title 1"/>
+          <p:cNvSpPr>
+            <a:spLocks noGrp="1"/>
+          </p:cNvSpPr>
+          <p:nvPr>
+            <p:ph type="title"/>
+          </p:nvPr>
+        </p:nvSpPr>
+        <p:spPr/>
+        <p:txBody>
+          <a:bodyPr/>
+          <a:lstStyle/>
+          <a:p>
+            <a:r>
+              <a:t>技术架构</a:t>
+            </a:r>
+          </a:p>
+        </p:txBody>
+      </p:sp>
+      <p:sp>
+        <p:nvSpPr>
+          <p:cNvPr id="3" name="Content Placeholder 2"/>
+          <p:cNvSpPr>
+            <a:spLocks noGrp="1"/>
+          </p:cNvSpPr>
+          <p:nvPr>
+            <p:ph idx="1"/>
+          </p:nvPr>
+        </p:nvSpPr>
+        <p:spPr/>
+        <p:txBody>
+          <a:bodyPr/>
+          <a:lstStyle/>
+          <a:p>
+            <a:r>
+              <a:t>前端：Vue3 + Three.js (3D沙盘) + D3.js (可视化)</a:t>
+            </a:r>
+          </a:p>
+          <a:p>
+            <a:r>
+              <a:t>后端：FastAPI + Python 3.10</a:t>
+            </a:r>
+          </a:p>
+          <a:p>
+            <a:r>
+              <a:t>核心引擎：自研轻量 Multi-Agent 编排（不用LangGraph）</a:t>
+            </a:r>
+          </a:p>
+          <a:p>
+            <a:r>
+              <a:t> - LLM tier路由，适配多种国内大模型</a:t>
+            </a:r>
+          </a:p>
+          <a:p>
+            <a:r>
+              <a:t> - Candidate/CompanyHR/Interviewer Agent</a:t>
+            </a:r>
+          </a:p>
+          <a:p>
+            <a:r>
+              <a:t>部署方案：</a:t>
+            </a:r>
+          </a:p>
+          <a:p>
+            <a:r>
+              <a:t> - Azure VM + Caddy + Cloudflare CDN</a:t>
             </a:r>
           </a:p>
         </p:txBody>
@@ -4546,14 +3717,6 @@
 <file path=ppt/slides/slide7.xml><?xml version="1.0" encoding="utf-8"?>
 <p:sld xmlns:a="http://schemas.openxmlformats.org/drawingml/2006/main" xmlns:p="http://schemas.openxmlformats.org/presentationml/2006/main" xmlns:r="http://schemas.openxmlformats.org/officeDocument/2006/relationships">
   <p:cSld>
-    <p:bg>
-      <p:bgPr>
-        <a:solidFill>
-          <a:srgbClr val="0A0E1A"/>
-        </a:solidFill>
-        <a:effectLst/>
-      </p:bgPr>
-    </p:bg>
     <p:spTree>
       <p:nvGrpSpPr>
         <p:cNvPr id="1" name=""/>
@@ -4563,94 +3726,74 @@
       <p:grpSpPr/>
       <p:sp>
         <p:nvSpPr>
-          <p:cNvPr id="2" name="TextBox 1"/>
-          <p:cNvSpPr txBox="1"/>
-          <p:nvPr/>
-        </p:nvSpPr>
-        <p:spPr>
-          <a:xfrm>
-            <a:off x="548640" y="320040"/>
-            <a:ext cx="10972800" cy="731520"/>
-          </a:xfrm>
-          <a:prstGeom prst="rect">
-            <a:avLst/>
-          </a:prstGeom>
-          <a:noFill/>
-        </p:spPr>
-        <p:txBody>
-          <a:bodyPr wrap="square">
-            <a:spAutoFit/>
-          </a:bodyPr>
-          <a:lstStyle/>
-          <a:p>
-            <a:pPr algn="l"/>
-            <a:r>
-              <a:rPr sz="2600" b="1">
-                <a:solidFill>
-                  <a:srgbClr val="22D3EE"/>
-                </a:solidFill>
-                <a:latin typeface="微软雅黑"/>
-              </a:rPr>
-              <a:t>3D 沙盘：约 300 家公司星团 · 你的数字分身</a:t>
-            </a:r>
-          </a:p>
-        </p:txBody>
-      </p:sp>
-      <p:pic>
-        <p:nvPicPr>
-          <p:cNvPr id="3" name="Picture 2" descr="sandbox.png"/>
-          <p:cNvPicPr>
-            <a:picLocks noChangeAspect="1"/>
-          </p:cNvPicPr>
-          <p:nvPr/>
-        </p:nvPicPr>
-        <p:blipFill>
-          <a:blip r:embed="rId2"/>
-          <a:stretch>
-            <a:fillRect/>
-          </a:stretch>
-        </p:blipFill>
-        <p:spPr>
-          <a:xfrm>
-            <a:off x="1249527" y="1143000"/>
-            <a:ext cx="9692640" cy="5449824"/>
-          </a:xfrm>
-          <a:prstGeom prst="rect">
-            <a:avLst/>
-          </a:prstGeom>
-        </p:spPr>
-      </p:pic>
-      <p:sp>
-        <p:nvSpPr>
-          <p:cNvPr id="4" name="TextBox 3"/>
-          <p:cNvSpPr txBox="1"/>
-          <p:nvPr/>
-        </p:nvSpPr>
-        <p:spPr>
-          <a:xfrm>
-            <a:off x="548640" y="6400800"/>
-            <a:ext cx="10972800" cy="365760"/>
-          </a:xfrm>
-          <a:prstGeom prst="rect">
-            <a:avLst/>
-          </a:prstGeom>
-          <a:noFill/>
-        </p:spPr>
-        <p:txBody>
-          <a:bodyPr wrap="square">
-            <a:spAutoFit/>
-          </a:bodyPr>
-          <a:lstStyle/>
-          <a:p>
-            <a:pPr algn="l"/>
-            <a:r>
-              <a:rPr sz="1300" b="0">
-                <a:solidFill>
-                  <a:srgbClr val="8B93A7"/>
-                </a:solidFill>
-                <a:latin typeface="微软雅黑"/>
-              </a:rPr>
-              <a:t>每家公司独立 HR Agent，可现场采访；点击公司节点触发投递</a:t>
+          <p:cNvPr id="2" name="Title 1"/>
+          <p:cNvSpPr>
+            <a:spLocks noGrp="1"/>
+          </p:cNvSpPr>
+          <p:nvPr>
+            <p:ph type="title"/>
+          </p:nvPr>
+        </p:nvSpPr>
+        <p:spPr/>
+        <p:txBody>
+          <a:bodyPr/>
+          <a:lstStyle/>
+          <a:p>
+            <a:r>
+              <a:t>商业模式：主战场是高校</a:t>
+            </a:r>
+          </a:p>
+        </p:txBody>
+      </p:sp>
+      <p:sp>
+        <p:nvSpPr>
+          <p:cNvPr id="3" name="Content Placeholder 2"/>
+          <p:cNvSpPr>
+            <a:spLocks noGrp="1"/>
+          </p:cNvSpPr>
+          <p:nvPr>
+            <p:ph idx="1"/>
+          </p:nvPr>
+        </p:nvSpPr>
+        <p:spPr/>
+        <p:txBody>
+          <a:bodyPr/>
+          <a:lstStyle/>
+          <a:p>
+            <a:r>
+              <a:t>主营收：高校就业指导中心（to G SaaS订阅）</a:t>
+            </a:r>
+          </a:p>
+          <a:p>
+            <a:r>
+              <a:t> - 购买群体级人才洞察，将就业指导从“经验驱动”升级为“数据驱动”</a:t>
+            </a:r>
+          </a:p>
+          <a:p/>
+          <a:p>
+            <a:r>
+              <a:t>获客层：C端应届生（免费+数据飞轮）</a:t>
+            </a:r>
+          </a:p>
+          <a:p>
+            <a:r>
+              <a:t> - 口碑传播渗透校内，反推学校采购</a:t>
+            </a:r>
+          </a:p>
+          <a:p/>
+          <a:p>
+            <a:r>
+              <a:t>第二曲线：B端企业与招聘平台</a:t>
+            </a:r>
+          </a:p>
+          <a:p>
+            <a:r>
+              <a:t> - 企业反向品牌报告（你公司在应届生眼里的真实画像）</a:t>
+            </a:r>
+          </a:p>
+          <a:p>
+            <a:r>
+              <a:t> - 与招聘平台集成</a:t>
             </a:r>
           </a:p>
         </p:txBody>
@@ -4666,14 +3809,6 @@
 <file path=ppt/slides/slide8.xml><?xml version="1.0" encoding="utf-8"?>
 <p:sld xmlns:a="http://schemas.openxmlformats.org/drawingml/2006/main" xmlns:p="http://schemas.openxmlformats.org/presentationml/2006/main" xmlns:r="http://schemas.openxmlformats.org/officeDocument/2006/relationships">
   <p:cSld>
-    <p:bg>
-      <p:bgPr>
-        <a:solidFill>
-          <a:srgbClr val="0A0E1A"/>
-        </a:solidFill>
-        <a:effectLst/>
-      </p:bgPr>
-    </p:bg>
     <p:spTree>
       <p:nvGrpSpPr>
         <p:cNvPr id="1" name=""/>
@@ -4683,142 +3818,85 @@
       <p:grpSpPr/>
       <p:sp>
         <p:nvSpPr>
-          <p:cNvPr id="2" name="TextBox 1"/>
-          <p:cNvSpPr txBox="1"/>
-          <p:nvPr/>
-        </p:nvSpPr>
-        <p:spPr>
-          <a:xfrm>
-            <a:off x="822960" y="822960"/>
-            <a:ext cx="10515600" cy="914400"/>
-          </a:xfrm>
-          <a:prstGeom prst="rect">
-            <a:avLst/>
-          </a:prstGeom>
-          <a:noFill/>
-        </p:spPr>
-        <p:txBody>
-          <a:bodyPr wrap="square">
-            <a:spAutoFit/>
-          </a:bodyPr>
-          <a:lstStyle/>
-          <a:p>
-            <a:pPr algn="l"/>
-            <a:r>
-              <a:rPr sz="3200" b="1">
-                <a:solidFill>
-                  <a:srgbClr val="22D3EE"/>
-                </a:solidFill>
-                <a:latin typeface="微软雅黑"/>
-              </a:rPr>
-              <a:t>反事实预演：从预测未来，到实验未来（核心卖点）</a:t>
-            </a:r>
-          </a:p>
-        </p:txBody>
-      </p:sp>
-      <p:sp>
-        <p:nvSpPr>
-          <p:cNvPr id="3" name="Rounded Rectangle 2"/>
-          <p:cNvSpPr/>
-          <p:nvPr/>
-        </p:nvSpPr>
-        <p:spPr>
-          <a:xfrm>
-            <a:off x="822960" y="2103120"/>
-            <a:ext cx="10515600" cy="3840480"/>
-          </a:xfrm>
-          <a:prstGeom prst="roundRect">
-            <a:avLst/>
-          </a:prstGeom>
-          <a:solidFill>
-            <a:srgbClr val="131829"/>
-          </a:solidFill>
-          <a:ln w="12700">
-            <a:solidFill>
-              <a:srgbClr val="22D3EE"/>
-            </a:solidFill>
-          </a:ln>
-          <a:effectLst/>
-        </p:spPr>
-        <p:style>
-          <a:lnRef idx="1">
-            <a:schemeClr val="accent1"/>
-          </a:lnRef>
-          <a:fillRef idx="3">
-            <a:schemeClr val="accent1"/>
-          </a:fillRef>
-          <a:effectRef idx="2">
-            <a:schemeClr val="accent1"/>
-          </a:effectRef>
-          <a:fontRef idx="minor">
-            <a:schemeClr val="lt1"/>
-          </a:fontRef>
-        </p:style>
-        <p:txBody>
-          <a:bodyPr rtlCol="0" anchor="t" wrap="square" lIns="457200" tIns="365760"/>
-          <a:lstStyle/>
-          <a:p>
-            <a:pPr algn="ctr">
-              <a:spcAft>
-                <a:spcPts val="1400"/>
-              </a:spcAft>
-            </a:pPr>
-            <a:r>
-              <a:rPr sz="1800" b="0">
-                <a:solidFill>
-                  <a:srgbClr val="E5E9F0"/>
-                </a:solidFill>
-                <a:latin typeface="微软雅黑"/>
-              </a:rPr>
-              <a:t>·  拖动三个滑块：简历质量 / 项目含金量 / 学校档，系统把市场重新推演一遍</a:t>
-            </a:r>
-          </a:p>
-          <a:p>
-            <a:pPr>
-              <a:spcAft>
-                <a:spcPts val="1400"/>
-              </a:spcAft>
-            </a:pPr>
-            <a:r>
-              <a:rPr sz="1800" b="0">
-                <a:solidFill>
-                  <a:srgbClr val="E5E9F0"/>
-                </a:solidFill>
-                <a:latin typeface="微软雅黑"/>
-              </a:rPr>
-              <a:t>·  输出 offer 数、薪资、去向的变化——例：项目含金量 +15 → 平均 offer 从 5.3 升到 9.4、中位薪资从 53 万升到 62 万</a:t>
-            </a:r>
-          </a:p>
-          <a:p>
-            <a:pPr>
-              <a:spcAft>
-                <a:spcPts val="1400"/>
-              </a:spcAft>
-            </a:pPr>
-            <a:r>
-              <a:rPr sz="1800" b="0">
-                <a:solidFill>
-                  <a:srgbClr val="E5E9F0"/>
-                </a:solidFill>
-                <a:latin typeface="微软雅黑"/>
-              </a:rPr>
-              <a:t>·  不止告诉你「简历 80 分」，更告诉你「改了会怎样」</a:t>
-            </a:r>
-          </a:p>
-          <a:p>
-            <a:pPr>
-              <a:spcAft>
-                <a:spcPts val="1400"/>
-              </a:spcAft>
-            </a:pPr>
-            <a:r>
-              <a:rPr sz="1800" b="0">
-                <a:solidFill>
-                  <a:srgbClr val="E5E9F0"/>
-                </a:solidFill>
-                <a:latin typeface="微软雅黑"/>
-              </a:rPr>
-              <a:t>·  把职业规划从玄学，变成基于概率与因果的科学决策（现场 demo 可动态演示）</a:t>
+          <p:cNvPr id="2" name="Title 1"/>
+          <p:cNvSpPr>
+            <a:spLocks noGrp="1"/>
+          </p:cNvSpPr>
+          <p:nvPr>
+            <p:ph type="title"/>
+          </p:nvPr>
+        </p:nvSpPr>
+        <p:spPr/>
+        <p:txBody>
+          <a:bodyPr/>
+          <a:lstStyle/>
+          <a:p>
+            <a:r>
+              <a:t>数字孪生对齐引擎（愿景/路线图，尚未实现）</a:t>
+            </a:r>
+          </a:p>
+        </p:txBody>
+      </p:sp>
+      <p:sp>
+        <p:nvSpPr>
+          <p:cNvPr id="3" name="Content Placeholder 2"/>
+          <p:cNvSpPr>
+            <a:spLocks noGrp="1"/>
+          </p:cNvSpPr>
+          <p:nvPr>
+            <p:ph idx="1"/>
+          </p:nvPr>
+        </p:nvSpPr>
+        <p:spPr/>
+        <p:txBody>
+          <a:bodyPr/>
+          <a:lstStyle/>
+          <a:p>
+            <a:r>
+              <a:t>【本页为接入智联真实数据后的规划，当前尚未实现】</a:t>
+            </a:r>
+          </a:p>
+          <a:p/>
+          <a:p>
+            <a:r>
+              <a:t>现状（冷启动）：</a:t>
+            </a:r>
+          </a:p>
+          <a:p>
+            <a:r>
+              <a:t> - 沙盘里约300个HR Agent的偏好完全由LLM先验知识驱动</a:t>
+            </a:r>
+          </a:p>
+          <a:p>
+            <a:r>
+              <a:t> - 尚未被任何一条真实招聘行为数据校准过</a:t>
+            </a:r>
+          </a:p>
+          <a:p/>
+          <a:p>
+            <a:r>
+              <a:t>规划（接入智联数据后）：</a:t>
+            </a:r>
+          </a:p>
+          <a:p>
+            <a:r>
+              <a:t> - 接入平台真实行为数据（已读不回/发起沟通/发放offer）</a:t>
+            </a:r>
+          </a:p>
+          <a:p>
+            <a:r>
+              <a:t> - 用强化学习持续校准HR Agent的偏好分布</a:t>
+            </a:r>
+          </a:p>
+          <a:p>
+            <a:r>
+              <a:t> - 使沙盘从孤立模拟升级为招聘市场的“实时数字孪生”</a:t>
+            </a:r>
+          </a:p>
+          <a:p/>
+          <a:p>
+            <a:r>
+              <a:t>诚实边界：这一步没有回测数据支撑效果，讲的是方向，不是成果——也是我们希望通过本次决赛促成的合作方向。</a:t>
             </a:r>
           </a:p>
         </p:txBody>
@@ -4834,14 +3912,6 @@
 <file path=ppt/slides/slide9.xml><?xml version="1.0" encoding="utf-8"?>
 <p:sld xmlns:a="http://schemas.openxmlformats.org/drawingml/2006/main" xmlns:p="http://schemas.openxmlformats.org/presentationml/2006/main" xmlns:r="http://schemas.openxmlformats.org/officeDocument/2006/relationships">
   <p:cSld>
-    <p:bg>
-      <p:bgPr>
-        <a:solidFill>
-          <a:srgbClr val="0A0E1A"/>
-        </a:solidFill>
-        <a:effectLst/>
-      </p:bgPr>
-    </p:bg>
     <p:spTree>
       <p:nvGrpSpPr>
         <p:cNvPr id="1" name=""/>
@@ -4849,30 +3919,85 @@
         <p:nvPr/>
       </p:nvGrpSpPr>
       <p:grpSpPr/>
-      <p:pic>
-        <p:nvPicPr>
-          <p:cNvPr id="2" name="Picture 1" descr="design_arch.png"/>
-          <p:cNvPicPr>
-            <a:picLocks noChangeAspect="1"/>
-          </p:cNvPicPr>
-          <p:nvPr/>
-        </p:nvPicPr>
-        <p:blipFill>
-          <a:blip r:embed="rId2"/>
-          <a:stretch>
-            <a:fillRect/>
-          </a:stretch>
-        </p:blipFill>
-        <p:spPr>
-          <a:xfrm>
-            <a:off x="0" y="0"/>
-            <a:ext cx="12191695" cy="6858000"/>
-          </a:xfrm>
-          <a:prstGeom prst="rect">
-            <a:avLst/>
-          </a:prstGeom>
-        </p:spPr>
-      </p:pic>
+      <p:sp>
+        <p:nvSpPr>
+          <p:cNvPr id="2" name="Title 1"/>
+          <p:cNvSpPr>
+            <a:spLocks noGrp="1"/>
+          </p:cNvSpPr>
+          <p:nvPr>
+            <p:ph type="title"/>
+          </p:nvPr>
+        </p:nvSpPr>
+        <p:spPr/>
+        <p:txBody>
+          <a:bodyPr/>
+          <a:lstStyle/>
+          <a:p>
+            <a:r>
+              <a:t>数据合规（0风险）</a:t>
+            </a:r>
+          </a:p>
+        </p:txBody>
+      </p:sp>
+      <p:sp>
+        <p:nvSpPr>
+          <p:cNvPr id="3" name="Content Placeholder 2"/>
+          <p:cNvSpPr>
+            <a:spLocks noGrp="1"/>
+          </p:cNvSpPr>
+          <p:nvPr>
+            <p:ph idx="1"/>
+          </p:nvPr>
+        </p:nvSpPr>
+        <p:spPr/>
+        <p:txBody>
+          <a:bodyPr/>
+          <a:lstStyle/>
+          <a:p>
+            <a:r>
+              <a:t>所有数据均为合成数据：</a:t>
+            </a:r>
+          </a:p>
+          <a:p>
+            <a:r>
+              <a:t> - 49家虚构公司全部代号化（无真实名称）</a:t>
+            </a:r>
+          </a:p>
+          <a:p>
+            <a:r>
+              <a:t> - 200名求职者均为化名生成的persona</a:t>
+            </a:r>
+          </a:p>
+          <a:p/>
+          <a:p>
+            <a:r>
+              <a:t>双层兜底拦截：</a:t>
+            </a:r>
+          </a:p>
+          <a:p>
+            <a:r>
+              <a:t> - Prompt约束不准出现真名</a:t>
+            </a:r>
+          </a:p>
+          <a:p>
+            <a:r>
+              <a:t> - 落盘前强字典扫描替换（47家真公司名拦截）</a:t>
+            </a:r>
+          </a:p>
+          <a:p/>
+          <a:p>
+            <a:r>
+              <a:t>零PII处理：</a:t>
+            </a:r>
+          </a:p>
+          <a:p>
+            <a:r>
+              <a:t> - 用户上传简历仅驻留会话内存，不上云不留存</a:t>
+            </a:r>
+          </a:p>
+        </p:txBody>
+      </p:sp>
     </p:spTree>
   </p:cSld>
   <p:clrMapOvr>

--- a/docs/submission/春招平行宇宙-决赛答辩.pptx
+++ b/docs/submission/春招平行宇宙-决赛答辩.pptx
@@ -15,8 +15,14 @@
     <p:sldId id="263" r:id="rId14"/>
     <p:sldId id="264" r:id="rId15"/>
     <p:sldId id="265" r:id="rId16"/>
+    <p:sldId id="266" r:id="rId17"/>
+    <p:sldId id="267" r:id="rId18"/>
+    <p:sldId id="268" r:id="rId19"/>
+    <p:sldId id="269" r:id="rId20"/>
+    <p:sldId id="270" r:id="rId21"/>
+    <p:sldId id="271" r:id="rId22"/>
   </p:sldIdLst>
-  <p:sldSz cx="9144000" cy="6858000" type="screen4x3"/>
+  <p:sldSz cx="12191695" cy="6858000" type="screen4x3"/>
   <p:notesSz cx="6858000" cy="9144000"/>
   <p:defaultTextStyle>
     <a:defPPr>
@@ -3090,6 +3096,14 @@
 <file path=ppt/slides/slide1.xml><?xml version="1.0" encoding="utf-8"?>
 <p:sld xmlns:a="http://schemas.openxmlformats.org/drawingml/2006/main" xmlns:p="http://schemas.openxmlformats.org/presentationml/2006/main" xmlns:r="http://schemas.openxmlformats.org/officeDocument/2006/relationships">
   <p:cSld>
+    <p:bg>
+      <p:bgPr>
+        <a:solidFill>
+          <a:srgbClr val="0A0E1A"/>
+        </a:solidFill>
+        <a:effectLst/>
+      </p:bgPr>
+    </p:bg>
     <p:spTree>
       <p:nvGrpSpPr>
         <p:cNvPr id="1" name=""/>
@@ -3097,69 +3111,30 @@
         <p:nvPr/>
       </p:nvGrpSpPr>
       <p:grpSpPr/>
-      <p:sp>
-        <p:nvSpPr>
-          <p:cNvPr id="2" name="Title 1"/>
-          <p:cNvSpPr>
-            <a:spLocks noGrp="1"/>
-          </p:cNvSpPr>
-          <p:nvPr>
-            <p:ph type="ctrTitle"/>
-          </p:nvPr>
-        </p:nvSpPr>
-        <p:spPr/>
-        <p:txBody>
-          <a:bodyPr/>
-          <a:lstStyle/>
-          <a:p>
-            <a:r>
-              <a:t>春招平行宇宙</a:t>
-            </a:r>
-          </a:p>
-          <a:p>
-            <a:r>
-              <a:t>Career Multiverse</a:t>
-            </a:r>
-          </a:p>
-        </p:txBody>
-      </p:sp>
-      <p:sp>
-        <p:nvSpPr>
-          <p:cNvPr id="3" name="Subtitle 2"/>
-          <p:cNvSpPr>
-            <a:spLocks noGrp="1"/>
-          </p:cNvSpPr>
-          <p:nvPr>
-            <p:ph type="subTitle" idx="1"/>
-          </p:nvPr>
-        </p:nvSpPr>
-        <p:spPr/>
-        <p:txBody>
-          <a:bodyPr/>
-          <a:lstStyle/>
-          <a:p>
-            <a:r>
-              <a:t>让 AI 替你跑完 1000 次春招</a:t>
-            </a:r>
-          </a:p>
-          <a:p/>
-          <a:p>
-            <a:r>
-              <a:t>可实验的人才市场沙盘</a:t>
-            </a:r>
-          </a:p>
-          <a:p>
-            <a:r>
-              <a:t>tljcpa</a:t>
-            </a:r>
-          </a:p>
-          <a:p>
-            <a:r>
-              <a:t>2026年7月</a:t>
-            </a:r>
-          </a:p>
-        </p:txBody>
-      </p:sp>
+      <p:pic>
+        <p:nvPicPr>
+          <p:cNvPr id="2" name="Picture 1" descr="design_cover.png"/>
+          <p:cNvPicPr>
+            <a:picLocks noChangeAspect="1"/>
+          </p:cNvPicPr>
+          <p:nvPr/>
+        </p:nvPicPr>
+        <p:blipFill>
+          <a:blip r:embed="rId2"/>
+          <a:stretch>
+            <a:fillRect/>
+          </a:stretch>
+        </p:blipFill>
+        <p:spPr>
+          <a:xfrm>
+            <a:off x="0" y="0"/>
+            <a:ext cx="12191695" cy="6858000"/>
+          </a:xfrm>
+          <a:prstGeom prst="rect">
+            <a:avLst/>
+          </a:prstGeom>
+        </p:spPr>
+      </p:pic>
     </p:spTree>
   </p:cSld>
   <p:clrMapOvr>
@@ -3171,6 +3146,14 @@
 <file path=ppt/slides/slide10.xml><?xml version="1.0" encoding="utf-8"?>
 <p:sld xmlns:a="http://schemas.openxmlformats.org/drawingml/2006/main" xmlns:p="http://schemas.openxmlformats.org/presentationml/2006/main" xmlns:r="http://schemas.openxmlformats.org/officeDocument/2006/relationships">
   <p:cSld>
+    <p:bg>
+      <p:bgPr>
+        <a:solidFill>
+          <a:srgbClr val="0A0E1A"/>
+        </a:solidFill>
+        <a:effectLst/>
+      </p:bgPr>
+    </p:bg>
     <p:spTree>
       <p:nvGrpSpPr>
         <p:cNvPr id="1" name=""/>
@@ -3178,80 +3161,1069 @@
         <p:nvPr/>
       </p:nvGrpSpPr>
       <p:grpSpPr/>
-      <p:sp>
-        <p:nvSpPr>
-          <p:cNvPr id="2" name="Title 1"/>
-          <p:cNvSpPr>
-            <a:spLocks noGrp="1"/>
-          </p:cNvSpPr>
-          <p:nvPr>
-            <p:ph type="title"/>
-          </p:nvPr>
-        </p:nvSpPr>
-        <p:spPr/>
-        <p:txBody>
-          <a:bodyPr/>
-          <a:lstStyle/>
-          <a:p>
-            <a:r>
-              <a:t>团队与未来展望</a:t>
-            </a:r>
-          </a:p>
-        </p:txBody>
-      </p:sp>
-      <p:sp>
-        <p:nvSpPr>
-          <p:cNvPr id="3" name="Content Placeholder 2"/>
-          <p:cNvSpPr>
-            <a:spLocks noGrp="1"/>
-          </p:cNvSpPr>
-          <p:nvPr>
-            <p:ph idx="1"/>
-          </p:nvPr>
-        </p:nvSpPr>
-        <p:spPr/>
-        <p:txBody>
-          <a:bodyPr/>
-          <a:lstStyle/>
-          <a:p>
-            <a:r>
-              <a:t>团队构成：</a:t>
-            </a:r>
-          </a:p>
-          <a:p>
-            <a:r>
-              <a:t> - tljcpa (跨考非科班学生)</a:t>
-            </a:r>
-          </a:p>
-          <a:p>
-            <a:r>
-              <a:t> - Claude Code (AI 辅助结对)</a:t>
-            </a:r>
-          </a:p>
-          <a:p>
-            <a:r>
-              <a:t> - 这是AI赋能下，1个人+AI完成完整产品开发的真实样本</a:t>
-            </a:r>
-          </a:p>
-          <a:p/>
-          <a:p>
-            <a:r>
-              <a:t>未来诉求：</a:t>
-            </a:r>
-          </a:p>
-          <a:p>
-            <a:r>
-              <a:t> - 期望加入智联生态合作</a:t>
-            </a:r>
-          </a:p>
-          <a:p>
-            <a:r>
-              <a:t> - 寻求种子轮投资（100-200万）</a:t>
-            </a:r>
-          </a:p>
-          <a:p>
-            <a:r>
-              <a:t> - 校园渠道推广与公开数据合作</a:t>
+      <p:pic>
+        <p:nvPicPr>
+          <p:cNvPr id="2" name="Picture 1" descr="design_chain.png"/>
+          <p:cNvPicPr>
+            <a:picLocks noChangeAspect="1"/>
+          </p:cNvPicPr>
+          <p:nvPr/>
+        </p:nvPicPr>
+        <p:blipFill>
+          <a:blip r:embed="rId2"/>
+          <a:stretch>
+            <a:fillRect/>
+          </a:stretch>
+        </p:blipFill>
+        <p:spPr>
+          <a:xfrm>
+            <a:off x="0" y="0"/>
+            <a:ext cx="12191695" cy="6858000"/>
+          </a:xfrm>
+          <a:prstGeom prst="rect">
+            <a:avLst/>
+          </a:prstGeom>
+        </p:spPr>
+      </p:pic>
+    </p:spTree>
+  </p:cSld>
+  <p:clrMapOvr>
+    <a:masterClrMapping/>
+  </p:clrMapOvr>
+</p:sld>
+</file>
+
+<file path=ppt/slides/slide11.xml><?xml version="1.0" encoding="utf-8"?>
+<p:sld xmlns:a="http://schemas.openxmlformats.org/drawingml/2006/main" xmlns:p="http://schemas.openxmlformats.org/presentationml/2006/main" xmlns:r="http://schemas.openxmlformats.org/officeDocument/2006/relationships">
+  <p:cSld>
+    <p:bg>
+      <p:bgPr>
+        <a:solidFill>
+          <a:srgbClr val="0A0E1A"/>
+        </a:solidFill>
+        <a:effectLst/>
+      </p:bgPr>
+    </p:bg>
+    <p:spTree>
+      <p:nvGrpSpPr>
+        <p:cNvPr id="1" name=""/>
+        <p:cNvGrpSpPr/>
+        <p:nvPr/>
+      </p:nvGrpSpPr>
+      <p:grpSpPr/>
+      <p:sp>
+        <p:nvSpPr>
+          <p:cNvPr id="2" name="TextBox 1"/>
+          <p:cNvSpPr txBox="1"/>
+          <p:nvPr/>
+        </p:nvSpPr>
+        <p:spPr>
+          <a:xfrm>
+            <a:off x="822960" y="822960"/>
+            <a:ext cx="10515600" cy="914400"/>
+          </a:xfrm>
+          <a:prstGeom prst="rect">
+            <a:avLst/>
+          </a:prstGeom>
+          <a:noFill/>
+        </p:spPr>
+        <p:txBody>
+          <a:bodyPr wrap="square">
+            <a:spAutoFit/>
+          </a:bodyPr>
+          <a:lstStyle/>
+          <a:p>
+            <a:pPr algn="l"/>
+            <a:r>
+              <a:rPr sz="3200" b="1">
+                <a:solidFill>
+                  <a:srgbClr val="22D3EE"/>
+                </a:solidFill>
+                <a:latin typeface="微软雅黑"/>
+              </a:rPr>
+              <a:t>从 demo 到全量：我们的引擎 × 平台的数据</a:t>
+            </a:r>
+          </a:p>
+        </p:txBody>
+      </p:sp>
+      <p:sp>
+        <p:nvSpPr>
+          <p:cNvPr id="3" name="Rounded Rectangle 2"/>
+          <p:cNvSpPr/>
+          <p:nvPr/>
+        </p:nvSpPr>
+        <p:spPr>
+          <a:xfrm>
+            <a:off x="822960" y="2103120"/>
+            <a:ext cx="10515600" cy="3840480"/>
+          </a:xfrm>
+          <a:prstGeom prst="roundRect">
+            <a:avLst/>
+          </a:prstGeom>
+          <a:solidFill>
+            <a:srgbClr val="131829"/>
+          </a:solidFill>
+          <a:ln w="12700">
+            <a:solidFill>
+              <a:srgbClr val="22D3EE"/>
+            </a:solidFill>
+          </a:ln>
+          <a:effectLst/>
+        </p:spPr>
+        <p:style>
+          <a:lnRef idx="1">
+            <a:schemeClr val="accent1"/>
+          </a:lnRef>
+          <a:fillRef idx="3">
+            <a:schemeClr val="accent1"/>
+          </a:fillRef>
+          <a:effectRef idx="2">
+            <a:schemeClr val="accent1"/>
+          </a:effectRef>
+          <a:fontRef idx="minor">
+            <a:schemeClr val="lt1"/>
+          </a:fontRef>
+        </p:style>
+        <p:txBody>
+          <a:bodyPr rtlCol="0" anchor="t" wrap="square" lIns="457200" tIns="365760"/>
+          <a:lstStyle/>
+          <a:p>
+            <a:pPr algn="ctr">
+              <a:spcAft>
+                <a:spcPts val="1400"/>
+              </a:spcAft>
+            </a:pPr>
+            <a:r>
+              <a:rPr sz="1800" b="0">
+                <a:solidFill>
+                  <a:srgbClr val="E5E9F0"/>
+                </a:solidFill>
+                <a:latin typeface="微软雅黑"/>
+              </a:rPr>
+              <a:t>·  现在：约 300 家虚构公司的沙盘——作用是证明引擎跑得通</a:t>
+            </a:r>
+          </a:p>
+          <a:p>
+            <a:pPr>
+              <a:spcAft>
+                <a:spcPts val="1400"/>
+              </a:spcAft>
+            </a:pPr>
+            <a:r>
+              <a:rPr sz="1800" b="0">
+                <a:solidFill>
+                  <a:srgbClr val="E5E9F0"/>
+                </a:solidFill>
+                <a:latin typeface="微软雅黑"/>
+              </a:rPr>
+              <a:t>·  核心资产不是数据量，是「让人才市场可实验」的引擎与方法论</a:t>
+            </a:r>
+          </a:p>
+          <a:p>
+            <a:pPr>
+              <a:spcAft>
+                <a:spcPts val="1400"/>
+              </a:spcAft>
+            </a:pPr>
+            <a:r>
+              <a:rPr sz="1800" b="0">
+                <a:solidFill>
+                  <a:srgbClr val="E5E9F0"/>
+                </a:solidFill>
+                <a:latin typeface="微软雅黑"/>
+              </a:rPr>
+              <a:t>·  接入平台级全量真实数据 + 算力 → 覆盖真实市场的人才市场数字孪生</a:t>
+            </a:r>
+          </a:p>
+          <a:p>
+            <a:pPr>
+              <a:spcAft>
+                <a:spcPts val="1400"/>
+              </a:spcAft>
+            </a:pPr>
+            <a:r>
+              <a:rPr sz="1800" b="0">
+                <a:solidFill>
+                  <a:srgbClr val="E5E9F0"/>
+                </a:solidFill>
+                <a:latin typeface="微软雅黑"/>
+              </a:rPr>
+              <a:t>·  这正是与平台最自然的合作：我们出引擎和方法，平台出数据、算力、场景</a:t>
+            </a:r>
+          </a:p>
+          <a:p>
+            <a:pPr>
+              <a:spcAft>
+                <a:spcPts val="1400"/>
+              </a:spcAft>
+            </a:pPr>
+            <a:r>
+              <a:rPr sz="1800" b="0">
+                <a:solidFill>
+                  <a:srgbClr val="E5E9F0"/>
+                </a:solidFill>
+                <a:latin typeface="微软雅黑"/>
+              </a:rPr>
+              <a:t>·  「缺数据」不是短板，是合作接口；全量下用分层架构（粗筛 + 精模拟）承接</a:t>
+            </a:r>
+          </a:p>
+        </p:txBody>
+      </p:sp>
+    </p:spTree>
+  </p:cSld>
+  <p:clrMapOvr>
+    <a:masterClrMapping/>
+  </p:clrMapOvr>
+</p:sld>
+</file>
+
+<file path=ppt/slides/slide12.xml><?xml version="1.0" encoding="utf-8"?>
+<p:sld xmlns:a="http://schemas.openxmlformats.org/drawingml/2006/main" xmlns:p="http://schemas.openxmlformats.org/presentationml/2006/main" xmlns:r="http://schemas.openxmlformats.org/officeDocument/2006/relationships">
+  <p:cSld>
+    <p:bg>
+      <p:bgPr>
+        <a:solidFill>
+          <a:srgbClr val="0A0E1A"/>
+        </a:solidFill>
+        <a:effectLst/>
+      </p:bgPr>
+    </p:bg>
+    <p:spTree>
+      <p:nvGrpSpPr>
+        <p:cNvPr id="1" name=""/>
+        <p:cNvGrpSpPr/>
+        <p:nvPr/>
+      </p:nvGrpSpPr>
+      <p:grpSpPr/>
+      <p:sp>
+        <p:nvSpPr>
+          <p:cNvPr id="2" name="TextBox 1"/>
+          <p:cNvSpPr txBox="1"/>
+          <p:nvPr/>
+        </p:nvSpPr>
+        <p:spPr>
+          <a:xfrm>
+            <a:off x="822960" y="822960"/>
+            <a:ext cx="10515600" cy="914400"/>
+          </a:xfrm>
+          <a:prstGeom prst="rect">
+            <a:avLst/>
+          </a:prstGeom>
+          <a:noFill/>
+        </p:spPr>
+        <p:txBody>
+          <a:bodyPr wrap="square">
+            <a:spAutoFit/>
+          </a:bodyPr>
+          <a:lstStyle/>
+          <a:p>
+            <a:pPr algn="l"/>
+            <a:r>
+              <a:rPr sz="3200" b="1">
+                <a:solidFill>
+                  <a:srgbClr val="FBBF24"/>
+                </a:solidFill>
+                <a:latin typeface="微软雅黑"/>
+              </a:rPr>
+              <a:t>数字孪生对齐引擎（愿景 / 路线图，尚未实现）</a:t>
+            </a:r>
+          </a:p>
+        </p:txBody>
+      </p:sp>
+      <p:sp>
+        <p:nvSpPr>
+          <p:cNvPr id="3" name="Rounded Rectangle 2"/>
+          <p:cNvSpPr/>
+          <p:nvPr/>
+        </p:nvSpPr>
+        <p:spPr>
+          <a:xfrm>
+            <a:off x="822960" y="2103120"/>
+            <a:ext cx="10515600" cy="3840480"/>
+          </a:xfrm>
+          <a:prstGeom prst="roundRect">
+            <a:avLst/>
+          </a:prstGeom>
+          <a:solidFill>
+            <a:srgbClr val="131829"/>
+          </a:solidFill>
+          <a:ln w="12700">
+            <a:solidFill>
+              <a:srgbClr val="22D3EE"/>
+            </a:solidFill>
+          </a:ln>
+          <a:effectLst/>
+        </p:spPr>
+        <p:style>
+          <a:lnRef idx="1">
+            <a:schemeClr val="accent1"/>
+          </a:lnRef>
+          <a:fillRef idx="3">
+            <a:schemeClr val="accent1"/>
+          </a:fillRef>
+          <a:effectRef idx="2">
+            <a:schemeClr val="accent1"/>
+          </a:effectRef>
+          <a:fontRef idx="minor">
+            <a:schemeClr val="lt1"/>
+          </a:fontRef>
+        </p:style>
+        <p:txBody>
+          <a:bodyPr rtlCol="0" anchor="t" wrap="square" lIns="457200" tIns="365760"/>
+          <a:lstStyle/>
+          <a:p>
+            <a:pPr algn="ctr">
+              <a:spcAft>
+                <a:spcPts val="1400"/>
+              </a:spcAft>
+            </a:pPr>
+            <a:r>
+              <a:rPr sz="1800" b="0">
+                <a:solidFill>
+                  <a:srgbClr val="E5E9F0"/>
+                </a:solidFill>
+                <a:latin typeface="微软雅黑"/>
+              </a:rPr>
+              <a:t>·  【本页讲的是接入智联真实数据后的规划，不是已经做到的事】</a:t>
+            </a:r>
+          </a:p>
+          <a:p>
+            <a:pPr>
+              <a:spcAft>
+                <a:spcPts val="1400"/>
+              </a:spcAft>
+            </a:pPr>
+            <a:r>
+              <a:rPr sz="1800" b="0">
+                <a:solidFill>
+                  <a:srgbClr val="E5E9F0"/>
+                </a:solidFill>
+                <a:latin typeface="微软雅黑"/>
+              </a:rPr>
+              <a:t>·  现状 · 冷启动：约 300 个 HR Agent 的偏好完全由 LLM 先验知识驱动，尚未被任何一条真实招聘数据校准过</a:t>
+            </a:r>
+          </a:p>
+          <a:p>
+            <a:pPr>
+              <a:spcAft>
+                <a:spcPts val="1400"/>
+              </a:spcAft>
+            </a:pPr>
+            <a:r>
+              <a:rPr sz="1800" b="0">
+                <a:solidFill>
+                  <a:srgbClr val="E5E9F0"/>
+                </a:solidFill>
+                <a:latin typeface="微软雅黑"/>
+              </a:rPr>
+              <a:t>·  规划 · 接入数据后：用智联平台每日真实行为数据（已读不回 / 发起沟通 / 发放 offer）+ 强化学习持续校准 HR Agent</a:t>
+            </a:r>
+          </a:p>
+          <a:p>
+            <a:pPr>
+              <a:spcAft>
+                <a:spcPts val="1400"/>
+              </a:spcAft>
+            </a:pPr>
+            <a:r>
+              <a:rPr sz="1800" b="0">
+                <a:solidFill>
+                  <a:srgbClr val="E5E9F0"/>
+                </a:solidFill>
+                <a:latin typeface="微软雅黑"/>
+              </a:rPr>
+              <a:t>·  愿景：沙盘从孤立的模拟，升级为招聘市场的「实时数字孪生」</a:t>
+            </a:r>
+          </a:p>
+          <a:p>
+            <a:pPr>
+              <a:spcAft>
+                <a:spcPts val="1400"/>
+              </a:spcAft>
+            </a:pPr>
+            <a:r>
+              <a:rPr sz="1800" b="0">
+                <a:solidFill>
+                  <a:srgbClr val="E5E9F0"/>
+                </a:solidFill>
+                <a:latin typeface="微软雅黑"/>
+              </a:rPr>
+              <a:t>·  诚实边界：这一步没有回测数据支撑效果，讲的是方向而非成果——也是我们想促成与智联合作的原因</a:t>
+            </a:r>
+          </a:p>
+        </p:txBody>
+      </p:sp>
+    </p:spTree>
+  </p:cSld>
+  <p:clrMapOvr>
+    <a:masterClrMapping/>
+  </p:clrMapOvr>
+</p:sld>
+</file>
+
+<file path=ppt/slides/slide13.xml><?xml version="1.0" encoding="utf-8"?>
+<p:sld xmlns:a="http://schemas.openxmlformats.org/drawingml/2006/main" xmlns:p="http://schemas.openxmlformats.org/presentationml/2006/main" xmlns:r="http://schemas.openxmlformats.org/officeDocument/2006/relationships">
+  <p:cSld>
+    <p:bg>
+      <p:bgPr>
+        <a:solidFill>
+          <a:srgbClr val="0A0E1A"/>
+        </a:solidFill>
+        <a:effectLst/>
+      </p:bgPr>
+    </p:bg>
+    <p:spTree>
+      <p:nvGrpSpPr>
+        <p:cNvPr id="1" name=""/>
+        <p:cNvGrpSpPr/>
+        <p:nvPr/>
+      </p:nvGrpSpPr>
+      <p:grpSpPr/>
+      <p:sp>
+        <p:nvSpPr>
+          <p:cNvPr id="2" name="TextBox 1"/>
+          <p:cNvSpPr txBox="1"/>
+          <p:nvPr/>
+        </p:nvSpPr>
+        <p:spPr>
+          <a:xfrm>
+            <a:off x="822960" y="822960"/>
+            <a:ext cx="10515600" cy="914400"/>
+          </a:xfrm>
+          <a:prstGeom prst="rect">
+            <a:avLst/>
+          </a:prstGeom>
+          <a:noFill/>
+        </p:spPr>
+        <p:txBody>
+          <a:bodyPr wrap="square">
+            <a:spAutoFit/>
+          </a:bodyPr>
+          <a:lstStyle/>
+          <a:p>
+            <a:pPr algn="l"/>
+            <a:r>
+              <a:rPr sz="3200" b="1">
+                <a:solidFill>
+                  <a:srgbClr val="FBBF24"/>
+                </a:solidFill>
+                <a:latin typeface="微软雅黑"/>
+              </a:rPr>
+              <a:t>人力资本市场的量化回测沙盘</a:t>
+            </a:r>
+          </a:p>
+        </p:txBody>
+      </p:sp>
+      <p:sp>
+        <p:nvSpPr>
+          <p:cNvPr id="3" name="Rounded Rectangle 2"/>
+          <p:cNvSpPr/>
+          <p:nvPr/>
+        </p:nvSpPr>
+        <p:spPr>
+          <a:xfrm>
+            <a:off x="822960" y="2103120"/>
+            <a:ext cx="10515600" cy="3840480"/>
+          </a:xfrm>
+          <a:prstGeom prst="roundRect">
+            <a:avLst/>
+          </a:prstGeom>
+          <a:solidFill>
+            <a:srgbClr val="131829"/>
+          </a:solidFill>
+          <a:ln w="12700">
+            <a:solidFill>
+              <a:srgbClr val="22D3EE"/>
+            </a:solidFill>
+          </a:ln>
+          <a:effectLst/>
+        </p:spPr>
+        <p:style>
+          <a:lnRef idx="1">
+            <a:schemeClr val="accent1"/>
+          </a:lnRef>
+          <a:fillRef idx="3">
+            <a:schemeClr val="accent1"/>
+          </a:fillRef>
+          <a:effectRef idx="2">
+            <a:schemeClr val="accent1"/>
+          </a:effectRef>
+          <a:fontRef idx="minor">
+            <a:schemeClr val="lt1"/>
+          </a:fontRef>
+        </p:style>
+        <p:txBody>
+          <a:bodyPr rtlCol="0" anchor="t" wrap="square" lIns="457200" tIns="365760"/>
+          <a:lstStyle/>
+          <a:p>
+            <a:pPr algn="ctr">
+              <a:spcAft>
+                <a:spcPts val="1400"/>
+              </a:spcAft>
+            </a:pPr>
+            <a:r>
+              <a:rPr sz="1800" b="0">
+                <a:solidFill>
+                  <a:srgbClr val="E5E9F0"/>
+                </a:solidFill>
+                <a:latin typeface="微软雅黑"/>
+              </a:rPr>
+              <a:t>·  金融投资 10 万都先跑一万次回测；择业这种人生最大投资、企业几百万招聘成本却仍靠肉身试错</a:t>
+            </a:r>
+          </a:p>
+          <a:p>
+            <a:pPr>
+              <a:spcAft>
+                <a:spcPts val="1400"/>
+              </a:spcAft>
+            </a:pPr>
+            <a:r>
+              <a:rPr sz="1800" b="0">
+                <a:solidFill>
+                  <a:srgbClr val="E5E9F0"/>
+                </a:solidFill>
+                <a:latin typeface="微软雅黑"/>
+              </a:rPr>
+              <a:t>·  接入真实数据后，这里可以是招聘界的「彭博终端」：C 端职业生涯 GPS 卖确定性，B 端雇主品牌与薪酬动态定价沙盘（调薪前先跑一遍，看人才流失率变化，省下真实试错成本，想象空间最大）</a:t>
+            </a:r>
+          </a:p>
+          <a:p>
+            <a:pPr>
+              <a:spcAft>
+                <a:spcPts val="1400"/>
+              </a:spcAft>
+            </a:pPr>
+            <a:r>
+              <a:rPr sz="1800" b="0">
+                <a:solidFill>
+                  <a:srgbClr val="E5E9F0"/>
+                </a:solidFill>
+                <a:latin typeface="微软雅黑"/>
+              </a:rPr>
+              <a:t>·  我们判断高校可能最先跑通（有就业率 KPI + 预算），但这是待验证的假设，不是算好的账</a:t>
+            </a:r>
+          </a:p>
+          <a:p>
+            <a:pPr>
+              <a:spcAft>
+                <a:spcPts val="1400"/>
+              </a:spcAft>
+            </a:pPr>
+            <a:r>
+              <a:rPr sz="1800" b="0">
+                <a:solidFill>
+                  <a:srgbClr val="E5E9F0"/>
+                </a:solidFill>
+                <a:latin typeface="微软雅黑"/>
+              </a:rPr>
+              <a:t>·  早期该做的是找标杆校验证真实付费意愿、转起数据飞轮，而非纸面财务预测</a:t>
+            </a:r>
+          </a:p>
+        </p:txBody>
+      </p:sp>
+    </p:spTree>
+  </p:cSld>
+  <p:clrMapOvr>
+    <a:masterClrMapping/>
+  </p:clrMapOvr>
+</p:sld>
+</file>
+
+<file path=ppt/slides/slide14.xml><?xml version="1.0" encoding="utf-8"?>
+<p:sld xmlns:a="http://schemas.openxmlformats.org/drawingml/2006/main" xmlns:p="http://schemas.openxmlformats.org/presentationml/2006/main" xmlns:r="http://schemas.openxmlformats.org/officeDocument/2006/relationships">
+  <p:cSld>
+    <p:bg>
+      <p:bgPr>
+        <a:solidFill>
+          <a:srgbClr val="0A0E1A"/>
+        </a:solidFill>
+        <a:effectLst/>
+      </p:bgPr>
+    </p:bg>
+    <p:spTree>
+      <p:nvGrpSpPr>
+        <p:cNvPr id="1" name=""/>
+        <p:cNvGrpSpPr/>
+        <p:nvPr/>
+      </p:nvGrpSpPr>
+      <p:grpSpPr/>
+      <p:sp>
+        <p:nvSpPr>
+          <p:cNvPr id="2" name="TextBox 1"/>
+          <p:cNvSpPr txBox="1"/>
+          <p:nvPr/>
+        </p:nvSpPr>
+        <p:spPr>
+          <a:xfrm>
+            <a:off x="822960" y="822960"/>
+            <a:ext cx="10515600" cy="914400"/>
+          </a:xfrm>
+          <a:prstGeom prst="rect">
+            <a:avLst/>
+          </a:prstGeom>
+          <a:noFill/>
+        </p:spPr>
+        <p:txBody>
+          <a:bodyPr wrap="square">
+            <a:spAutoFit/>
+          </a:bodyPr>
+          <a:lstStyle/>
+          <a:p>
+            <a:pPr algn="l"/>
+            <a:r>
+              <a:rPr sz="3200" b="1">
+                <a:solidFill>
+                  <a:srgbClr val="FBBF24"/>
+                </a:solidFill>
+                <a:latin typeface="微软雅黑"/>
+              </a:rPr>
+              <a:t>绝境案例：一位宝妈的真实推演（真数据 · 未美化）</a:t>
+            </a:r>
+          </a:p>
+        </p:txBody>
+      </p:sp>
+      <p:sp>
+        <p:nvSpPr>
+          <p:cNvPr id="3" name="Rounded Rectangle 2"/>
+          <p:cNvSpPr/>
+          <p:nvPr/>
+        </p:nvSpPr>
+        <p:spPr>
+          <a:xfrm>
+            <a:off x="822960" y="2103120"/>
+            <a:ext cx="10515600" cy="3840480"/>
+          </a:xfrm>
+          <a:prstGeom prst="roundRect">
+            <a:avLst/>
+          </a:prstGeom>
+          <a:solidFill>
+            <a:srgbClr val="131829"/>
+          </a:solidFill>
+          <a:ln w="12700">
+            <a:solidFill>
+              <a:srgbClr val="22D3EE"/>
+            </a:solidFill>
+          </a:ln>
+          <a:effectLst/>
+        </p:spPr>
+        <p:style>
+          <a:lnRef idx="1">
+            <a:schemeClr val="accent1"/>
+          </a:lnRef>
+          <a:fillRef idx="3">
+            <a:schemeClr val="accent1"/>
+          </a:fillRef>
+          <a:effectRef idx="2">
+            <a:schemeClr val="accent1"/>
+          </a:effectRef>
+          <a:fontRef idx="minor">
+            <a:schemeClr val="lt1"/>
+          </a:fontRef>
+        </p:style>
+        <p:txBody>
+          <a:bodyPr rtlCol="0" anchor="t" wrap="square" lIns="457200" tIns="365760"/>
+          <a:lstStyle/>
+          <a:p>
+            <a:pPr algn="ctr">
+              <a:spcAft>
+                <a:spcPts val="1400"/>
+              </a:spcAft>
+            </a:pPr>
+            <a:r>
+              <a:rPr sz="1800" b="0">
+                <a:solidFill>
+                  <a:srgbClr val="E5E9F0"/>
+                </a:solidFill>
+                <a:latin typeface="微软雅黑"/>
+              </a:rPr>
+              <a:t>·  画像：28岁 / 双非本科文科 / 2年全职带娃空窗 / 目标项目管理——在约300家公司大市场真跑，每档各8次（共24次真实LLM沙盘）</a:t>
+            </a:r>
+          </a:p>
+          <a:p>
+            <a:pPr>
+              <a:spcAft>
+                <a:spcPts val="1400"/>
+              </a:spcAft>
+            </a:pPr>
+            <a:r>
+              <a:rPr sz="1800" b="0">
+                <a:solidFill>
+                  <a:srgbClr val="E5E9F0"/>
+                </a:solidFill>
+                <a:latin typeface="微软雅黑"/>
+              </a:rPr>
+              <a:t>·  ① 基线（原始简历）：平均投52份 → 0面试 · 0 offer（8/8全军覆没）</a:t>
+            </a:r>
+          </a:p>
+          <a:p>
+            <a:pPr>
+              <a:spcAft>
+                <a:spcPts val="1400"/>
+              </a:spcAft>
+            </a:pPr>
+            <a:r>
+              <a:rPr sz="1800" b="0">
+                <a:solidFill>
+                  <a:srgbClr val="E5E9F0"/>
+                </a:solidFill>
+                <a:latin typeface="微软雅黑"/>
+              </a:rPr>
+              <a:t>·  ② 反事实·纯包装（带娃重构为多线程管理+主攻创业公司+薪资降10%）：仍 0 offer（8/8）——包装骗不过硬维度筛选</a:t>
+            </a:r>
+          </a:p>
+          <a:p>
+            <a:pPr>
+              <a:spcAft>
+                <a:spcPts val="1400"/>
+              </a:spcAft>
+            </a:pPr>
+            <a:r>
+              <a:rPr sz="1800" b="0">
+                <a:solidFill>
+                  <a:srgbClr val="E5E9F0"/>
+                </a:solidFill>
+                <a:latin typeface="微软雅黑"/>
+              </a:rPr>
+              <a:t>·  ③ 反事实·真补实力（PMP拿证+两个真实项目，含金量25→50）：本赛道仍 0 offer（8/8）</a:t>
+            </a:r>
+          </a:p>
+          <a:p>
+            <a:pPr>
+              <a:spcAft>
+                <a:spcPts val="1400"/>
+              </a:spcAft>
+            </a:pPr>
+            <a:r>
+              <a:rPr sz="1800" b="0">
+                <a:solidFill>
+                  <a:srgbClr val="E5E9F0"/>
+                </a:solidFill>
+                <a:latin typeface="微软雅黑"/>
+              </a:rPr>
+              <a:t>·  真相：瓶颈不是简历措辞，是赛道错配——该市场307家里263家以技术岗打头、57%要求硕士，双非文科转岗天然够不着门槛</a:t>
+            </a:r>
+          </a:p>
+          <a:p>
+            <a:pPr>
+              <a:spcAft>
+                <a:spcPts val="1400"/>
+              </a:spcAft>
+            </a:pPr>
+            <a:r>
+              <a:rPr sz="1800" b="0">
+                <a:solidFill>
+                  <a:srgbClr val="E5E9F0"/>
+                </a:solidFill>
+                <a:latin typeface="微软雅黑"/>
+              </a:rPr>
+              <a:t>·  沙盘不是用来证明「努力就能翻盘」的，而是提前告诉你残酷真相：真正的后悔药是趁早换一条能上桌的赛道，而非在错误赛道里死磕包装</a:t>
+            </a:r>
+          </a:p>
+        </p:txBody>
+      </p:sp>
+    </p:spTree>
+  </p:cSld>
+  <p:clrMapOvr>
+    <a:masterClrMapping/>
+  </p:clrMapOvr>
+</p:sld>
+</file>
+
+<file path=ppt/slides/slide15.xml><?xml version="1.0" encoding="utf-8"?>
+<p:sld xmlns:a="http://schemas.openxmlformats.org/drawingml/2006/main" xmlns:p="http://schemas.openxmlformats.org/presentationml/2006/main" xmlns:r="http://schemas.openxmlformats.org/officeDocument/2006/relationships">
+  <p:cSld>
+    <p:bg>
+      <p:bgPr>
+        <a:solidFill>
+          <a:srgbClr val="0A0E1A"/>
+        </a:solidFill>
+        <a:effectLst/>
+      </p:bgPr>
+    </p:bg>
+    <p:spTree>
+      <p:nvGrpSpPr>
+        <p:cNvPr id="1" name=""/>
+        <p:cNvGrpSpPr/>
+        <p:nvPr/>
+      </p:nvGrpSpPr>
+      <p:grpSpPr/>
+      <p:sp>
+        <p:nvSpPr>
+          <p:cNvPr id="2" name="TextBox 1"/>
+          <p:cNvSpPr txBox="1"/>
+          <p:nvPr/>
+        </p:nvSpPr>
+        <p:spPr>
+          <a:xfrm>
+            <a:off x="822960" y="822960"/>
+            <a:ext cx="10515600" cy="914400"/>
+          </a:xfrm>
+          <a:prstGeom prst="rect">
+            <a:avLst/>
+          </a:prstGeom>
+          <a:noFill/>
+        </p:spPr>
+        <p:txBody>
+          <a:bodyPr wrap="square">
+            <a:spAutoFit/>
+          </a:bodyPr>
+          <a:lstStyle/>
+          <a:p>
+            <a:pPr algn="l"/>
+            <a:r>
+              <a:rPr sz="3200" b="1">
+                <a:solidFill>
+                  <a:srgbClr val="A855F7"/>
+                </a:solidFill>
+                <a:latin typeface="微软雅黑"/>
+              </a:rPr>
+              <a:t>非科班单人 · 22 天 · AI 当队友</a:t>
+            </a:r>
+          </a:p>
+        </p:txBody>
+      </p:sp>
+      <p:sp>
+        <p:nvSpPr>
+          <p:cNvPr id="3" name="Rounded Rectangle 2"/>
+          <p:cNvSpPr/>
+          <p:nvPr/>
+        </p:nvSpPr>
+        <p:spPr>
+          <a:xfrm>
+            <a:off x="822960" y="2103120"/>
+            <a:ext cx="10515600" cy="3840480"/>
+          </a:xfrm>
+          <a:prstGeom prst="roundRect">
+            <a:avLst/>
+          </a:prstGeom>
+          <a:solidFill>
+            <a:srgbClr val="131829"/>
+          </a:solidFill>
+          <a:ln w="12700">
+            <a:solidFill>
+              <a:srgbClr val="22D3EE"/>
+            </a:solidFill>
+          </a:ln>
+          <a:effectLst/>
+        </p:spPr>
+        <p:style>
+          <a:lnRef idx="1">
+            <a:schemeClr val="accent1"/>
+          </a:lnRef>
+          <a:fillRef idx="3">
+            <a:schemeClr val="accent1"/>
+          </a:fillRef>
+          <a:effectRef idx="2">
+            <a:schemeClr val="accent1"/>
+          </a:effectRef>
+          <a:fontRef idx="minor">
+            <a:schemeClr val="lt1"/>
+          </a:fontRef>
+        </p:style>
+        <p:txBody>
+          <a:bodyPr rtlCol="0" anchor="t" wrap="square" lIns="457200" tIns="365760"/>
+          <a:lstStyle/>
+          <a:p>
+            <a:pPr algn="ctr">
+              <a:spcAft>
+                <a:spcPts val="1400"/>
+              </a:spcAft>
+            </a:pPr>
+            <a:r>
+              <a:rPr sz="1800" b="0">
+                <a:solidFill>
+                  <a:srgbClr val="E5E9F0"/>
+                </a:solidFill>
+                <a:latin typeface="微软雅黑"/>
+              </a:rPr>
+              <a:t>·  创作者 tljcpa：机械原理跨考考研中，非计算机科班</a:t>
+            </a:r>
+          </a:p>
+          <a:p>
+            <a:pPr>
+              <a:spcAft>
+                <a:spcPts val="1400"/>
+              </a:spcAft>
+            </a:pPr>
+            <a:r>
+              <a:rPr sz="1800" b="0">
+                <a:solidFill>
+                  <a:srgbClr val="E5E9F0"/>
+                </a:solidFill>
+                <a:latin typeface="微软雅黑"/>
+              </a:rPr>
+              <a:t>·  AI（Claude Code）做工程实现，核心创意 / 产品方向 / 架构决策由本人主导</a:t>
+            </a:r>
+          </a:p>
+          <a:p>
+            <a:pPr>
+              <a:spcAft>
+                <a:spcPts val="1400"/>
+              </a:spcAft>
+            </a:pPr>
+            <a:r>
+              <a:rPr sz="1800" b="0">
+                <a:solidFill>
+                  <a:srgbClr val="E5E9F0"/>
+                </a:solidFill>
+                <a:latin typeface="微软雅黑"/>
+              </a:rPr>
+              <a:t>·  落地证据：真实录屏演示 + 开源代码（可本地部署）+ 线上可访问 demo</a:t>
+            </a:r>
+          </a:p>
+        </p:txBody>
+      </p:sp>
+    </p:spTree>
+  </p:cSld>
+  <p:clrMapOvr>
+    <a:masterClrMapping/>
+  </p:clrMapOvr>
+</p:sld>
+</file>
+
+<file path=ppt/slides/slide16.xml><?xml version="1.0" encoding="utf-8"?>
+<p:sld xmlns:a="http://schemas.openxmlformats.org/drawingml/2006/main" xmlns:p="http://schemas.openxmlformats.org/presentationml/2006/main" xmlns:r="http://schemas.openxmlformats.org/officeDocument/2006/relationships">
+  <p:cSld>
+    <p:bg>
+      <p:bgPr>
+        <a:solidFill>
+          <a:srgbClr val="0A0E1A"/>
+        </a:solidFill>
+        <a:effectLst/>
+      </p:bgPr>
+    </p:bg>
+    <p:spTree>
+      <p:nvGrpSpPr>
+        <p:cNvPr id="1" name=""/>
+        <p:cNvGrpSpPr/>
+        <p:nvPr/>
+      </p:nvGrpSpPr>
+      <p:grpSpPr/>
+      <p:sp>
+        <p:nvSpPr>
+          <p:cNvPr id="2" name="TextBox 1"/>
+          <p:cNvSpPr txBox="1"/>
+          <p:nvPr/>
+        </p:nvSpPr>
+        <p:spPr>
+          <a:xfrm>
+            <a:off x="914400" y="2011680"/>
+            <a:ext cx="10332720" cy="1097280"/>
+          </a:xfrm>
+          <a:prstGeom prst="rect">
+            <a:avLst/>
+          </a:prstGeom>
+          <a:noFill/>
+        </p:spPr>
+        <p:txBody>
+          <a:bodyPr wrap="square">
+            <a:spAutoFit/>
+          </a:bodyPr>
+          <a:lstStyle/>
+          <a:p>
+            <a:pPr algn="ctr"/>
+            <a:r>
+              <a:rPr sz="3400" b="1">
+                <a:solidFill>
+                  <a:srgbClr val="E5E9F0"/>
+                </a:solidFill>
+                <a:latin typeface="微软雅黑"/>
+              </a:rPr>
+              <a:t>求职不该是一场只有一次的赌博</a:t>
+            </a:r>
+          </a:p>
+        </p:txBody>
+      </p:sp>
+      <p:sp>
+        <p:nvSpPr>
+          <p:cNvPr id="3" name="TextBox 2"/>
+          <p:cNvSpPr txBox="1"/>
+          <p:nvPr/>
+        </p:nvSpPr>
+        <p:spPr>
+          <a:xfrm>
+            <a:off x="914400" y="3200400"/>
+            <a:ext cx="10332720" cy="640080"/>
+          </a:xfrm>
+          <a:prstGeom prst="rect">
+            <a:avLst/>
+          </a:prstGeom>
+          <a:noFill/>
+        </p:spPr>
+        <p:txBody>
+          <a:bodyPr wrap="square">
+            <a:spAutoFit/>
+          </a:bodyPr>
+          <a:lstStyle/>
+          <a:p>
+            <a:pPr algn="ctr"/>
+            <a:r>
+              <a:rPr sz="2000" b="0">
+                <a:solidFill>
+                  <a:srgbClr val="22D3EE"/>
+                </a:solidFill>
+                <a:latin typeface="微软雅黑"/>
+              </a:rPr>
+              <a:t>让人才市场——先实验，再决策；不要用你唯一真实的人生去试错</a:t>
+            </a:r>
+          </a:p>
+        </p:txBody>
+      </p:sp>
+      <p:pic>
+        <p:nvPicPr>
+          <p:cNvPr id="4" name="Picture 3" descr="demo-二维码-multiverse.png"/>
+          <p:cNvPicPr>
+            <a:picLocks noChangeAspect="1"/>
+          </p:cNvPicPr>
+          <p:nvPr/>
+        </p:nvPicPr>
+        <p:blipFill>
+          <a:blip r:embed="rId2"/>
+          <a:stretch>
+            <a:fillRect/>
+          </a:stretch>
+        </p:blipFill>
+        <p:spPr>
+          <a:xfrm>
+            <a:off x="5272887" y="4114800"/>
+            <a:ext cx="1645920" cy="1645920"/>
+          </a:xfrm>
+          <a:prstGeom prst="rect">
+            <a:avLst/>
+          </a:prstGeom>
+        </p:spPr>
+      </p:pic>
+      <p:sp>
+        <p:nvSpPr>
+          <p:cNvPr id="5" name="TextBox 4"/>
+          <p:cNvSpPr txBox="1"/>
+          <p:nvPr/>
+        </p:nvSpPr>
+        <p:spPr>
+          <a:xfrm>
+            <a:off x="914400" y="5852160"/>
+            <a:ext cx="10332720" cy="457200"/>
+          </a:xfrm>
+          <a:prstGeom prst="rect">
+            <a:avLst/>
+          </a:prstGeom>
+          <a:noFill/>
+        </p:spPr>
+        <p:txBody>
+          <a:bodyPr wrap="square">
+            <a:spAutoFit/>
+          </a:bodyPr>
+          <a:lstStyle/>
+          <a:p>
+            <a:pPr algn="ctr"/>
+            <a:r>
+              <a:rPr sz="1300" b="0">
+                <a:solidFill>
+                  <a:srgbClr val="8B93A7"/>
+                </a:solidFill>
+                <a:latin typeface="微软雅黑"/>
+              </a:rPr>
+              <a:t>扫码体验 multiverse.zdwktlj.top  ·  github.com/tljcpa/career-multiverse</a:t>
             </a:r>
           </a:p>
         </p:txBody>
@@ -3267,6 +4239,14 @@
 <file path=ppt/slides/slide2.xml><?xml version="1.0" encoding="utf-8"?>
 <p:sld xmlns:a="http://schemas.openxmlformats.org/drawingml/2006/main" xmlns:p="http://schemas.openxmlformats.org/presentationml/2006/main" xmlns:r="http://schemas.openxmlformats.org/officeDocument/2006/relationships">
   <p:cSld>
+    <p:bg>
+      <p:bgPr>
+        <a:solidFill>
+          <a:srgbClr val="0A0E1A"/>
+        </a:solidFill>
+        <a:effectLst/>
+      </p:bgPr>
+    </p:bg>
     <p:spTree>
       <p:nvGrpSpPr>
         <p:cNvPr id="1" name=""/>
@@ -3274,70 +4254,30 @@
         <p:nvPr/>
       </p:nvGrpSpPr>
       <p:grpSpPr/>
-      <p:sp>
-        <p:nvSpPr>
-          <p:cNvPr id="2" name="Title 1"/>
-          <p:cNvSpPr>
-            <a:spLocks noGrp="1"/>
-          </p:cNvSpPr>
-          <p:nvPr>
-            <p:ph type="title"/>
-          </p:nvPr>
-        </p:nvSpPr>
-        <p:spPr/>
-        <p:txBody>
-          <a:bodyPr/>
-          <a:lstStyle/>
-          <a:p>
-            <a:r>
-              <a:t>应届生求职的真问题：三个看不见</a:t>
-            </a:r>
-          </a:p>
-        </p:txBody>
-      </p:sp>
-      <p:sp>
-        <p:nvSpPr>
-          <p:cNvPr id="3" name="Content Placeholder 2"/>
-          <p:cNvSpPr>
-            <a:spLocks noGrp="1"/>
-          </p:cNvSpPr>
-          <p:nvPr>
-            <p:ph idx="1"/>
-          </p:nvPr>
-        </p:nvSpPr>
-        <p:spPr/>
-        <p:txBody>
-          <a:bodyPr/>
-          <a:lstStyle/>
-          <a:p>
-            <a:r>
-              <a:t>每年1158万应届生，人均投递60+简历，70%没有回音。</a:t>
-            </a:r>
-          </a:p>
-          <a:p/>
-          <a:p>
-            <a:r>
-              <a:t>1. 看不见 HR 的真实评价：淘汰理由不透明</a:t>
-            </a:r>
-          </a:p>
-          <a:p>
-            <a:r>
-              <a:t>2. 看不见 公司的隐性门槛：实际门槛远高于JD</a:t>
-            </a:r>
-          </a:p>
-          <a:p>
-            <a:r>
-              <a:t>3. 看不见 决策的后悔成本：反事实无法验证</a:t>
-            </a:r>
-          </a:p>
-          <a:p/>
-          <a:p>
-            <a:r>
-              <a:t>现状：人才市场至今只能凭经验决策，缺一个“先实验、再决策”的地方。</a:t>
-            </a:r>
-          </a:p>
-        </p:txBody>
-      </p:sp>
+      <p:pic>
+        <p:nvPicPr>
+          <p:cNvPr id="2" name="Picture 1" descr="design_problem.png"/>
+          <p:cNvPicPr>
+            <a:picLocks noChangeAspect="1"/>
+          </p:cNvPicPr>
+          <p:nvPr/>
+        </p:nvPicPr>
+        <p:blipFill>
+          <a:blip r:embed="rId2"/>
+          <a:stretch>
+            <a:fillRect/>
+          </a:stretch>
+        </p:blipFill>
+        <p:spPr>
+          <a:xfrm>
+            <a:off x="0" y="0"/>
+            <a:ext cx="12191695" cy="6858000"/>
+          </a:xfrm>
+          <a:prstGeom prst="rect">
+            <a:avLst/>
+          </a:prstGeom>
+        </p:spPr>
+      </p:pic>
     </p:spTree>
   </p:cSld>
   <p:clrMapOvr>
@@ -3349,6 +4289,14 @@
 <file path=ppt/slides/slide3.xml><?xml version="1.0" encoding="utf-8"?>
 <p:sld xmlns:a="http://schemas.openxmlformats.org/drawingml/2006/main" xmlns:p="http://schemas.openxmlformats.org/presentationml/2006/main" xmlns:r="http://schemas.openxmlformats.org/officeDocument/2006/relationships">
   <p:cSld>
+    <p:bg>
+      <p:bgPr>
+        <a:solidFill>
+          <a:srgbClr val="0A0E1A"/>
+        </a:solidFill>
+        <a:effectLst/>
+      </p:bgPr>
+    </p:bg>
     <p:spTree>
       <p:nvGrpSpPr>
         <p:cNvPr id="1" name=""/>
@@ -3358,82 +4306,94 @@
       <p:grpSpPr/>
       <p:sp>
         <p:nvSpPr>
-          <p:cNvPr id="2" name="Title 1"/>
-          <p:cNvSpPr>
-            <a:spLocks noGrp="1"/>
-          </p:cNvSpPr>
-          <p:nvPr>
-            <p:ph type="title"/>
-          </p:nvPr>
-        </p:nvSpPr>
-        <p:spPr/>
-        <p:txBody>
-          <a:bodyPr/>
-          <a:lstStyle/>
-          <a:p>
-            <a:r>
-              <a:t>解决方案：把整个春招“虚拟跑一遍”</a:t>
-            </a:r>
-          </a:p>
-        </p:txBody>
-      </p:sp>
-      <p:sp>
-        <p:nvSpPr>
-          <p:cNvPr id="3" name="Content Placeholder 2"/>
-          <p:cNvSpPr>
-            <a:spLocks noGrp="1"/>
-          </p:cNvSpPr>
-          <p:nvPr>
-            <p:ph idx="1"/>
-          </p:nvPr>
-        </p:nvSpPr>
-        <p:spPr/>
-        <p:txBody>
-          <a:bodyPr/>
-          <a:lstStyle/>
-          <a:p>
-            <a:r>
-              <a:t>1. 上传真实简历 + GitHub + Blog</a:t>
-            </a:r>
-          </a:p>
-          <a:p>
-            <a:r>
-              <a:t>2. LLM 一次性多任务评估（五维画像评分+学校学历档加成）</a:t>
-            </a:r>
-          </a:p>
-          <a:p>
-            <a:r>
-              <a:t>3. 数字分身进入 3D 沙盘宇宙</a:t>
-            </a:r>
-          </a:p>
-          <a:p>
-            <a:r>
-              <a:t>   - 49家公司独立 HR Agent + 200名竞争者</a:t>
-            </a:r>
-          </a:p>
-          <a:p>
-            <a:r>
-              <a:t>   - 蒙特卡洛扩展跑完 1000 次平行春招</a:t>
-            </a:r>
-          </a:p>
-          <a:p>
-            <a:r>
-              <a:t>4. 输出预演结果：</a:t>
-            </a:r>
-          </a:p>
-          <a:p>
-            <a:r>
-              <a:t>   - 1000次平行宇宙的KPI统计（offer率、去向分布）</a:t>
-            </a:r>
-          </a:p>
-          <a:p>
-            <a:r>
-              <a:t>   - 反事实预演（如果改XX，结局如何变化）</a:t>
-            </a:r>
-          </a:p>
-          <a:p>
-            <a:r>
-              <a:t>   - AI教练个性化可执行建议</a:t>
+          <p:cNvPr id="2" name="TextBox 1"/>
+          <p:cNvSpPr txBox="1"/>
+          <p:nvPr/>
+        </p:nvSpPr>
+        <p:spPr>
+          <a:xfrm>
+            <a:off x="548640" y="320040"/>
+            <a:ext cx="10972800" cy="731520"/>
+          </a:xfrm>
+          <a:prstGeom prst="rect">
+            <a:avLst/>
+          </a:prstGeom>
+          <a:noFill/>
+        </p:spPr>
+        <p:txBody>
+          <a:bodyPr wrap="square">
+            <a:spAutoFit/>
+          </a:bodyPr>
+          <a:lstStyle/>
+          <a:p>
+            <a:pPr algn="l"/>
+            <a:r>
+              <a:rPr sz="2600" b="1">
+                <a:solidFill>
+                  <a:srgbClr val="22D3EE"/>
+                </a:solidFill>
+                <a:latin typeface="微软雅黑"/>
+              </a:rPr>
+              <a:t>把整个春招反复推演，用统计结论替代单次赌博</a:t>
+            </a:r>
+          </a:p>
+        </p:txBody>
+      </p:sp>
+      <p:pic>
+        <p:nvPicPr>
+          <p:cNvPr id="3" name="Picture 2" descr="report.png"/>
+          <p:cNvPicPr>
+            <a:picLocks noChangeAspect="1"/>
+          </p:cNvPicPr>
+          <p:nvPr/>
+        </p:nvPicPr>
+        <p:blipFill>
+          <a:blip r:embed="rId2"/>
+          <a:stretch>
+            <a:fillRect/>
+          </a:stretch>
+        </p:blipFill>
+        <p:spPr>
+          <a:xfrm>
+            <a:off x="1249527" y="1143000"/>
+            <a:ext cx="9692640" cy="5449824"/>
+          </a:xfrm>
+          <a:prstGeom prst="rect">
+            <a:avLst/>
+          </a:prstGeom>
+        </p:spPr>
+      </p:pic>
+      <p:sp>
+        <p:nvSpPr>
+          <p:cNvPr id="4" name="TextBox 3"/>
+          <p:cNvSpPr txBox="1"/>
+          <p:nvPr/>
+        </p:nvSpPr>
+        <p:spPr>
+          <a:xfrm>
+            <a:off x="548640" y="6400800"/>
+            <a:ext cx="10972800" cy="365760"/>
+          </a:xfrm>
+          <a:prstGeom prst="rect">
+            <a:avLst/>
+          </a:prstGeom>
+          <a:noFill/>
+        </p:spPr>
+        <p:txBody>
+          <a:bodyPr wrap="square">
+            <a:spAutoFit/>
+          </a:bodyPr>
+          <a:lstStyle/>
+          <a:p>
+            <a:pPr algn="l"/>
+            <a:r>
+              <a:rPr sz="1300" b="0">
+                <a:solidFill>
+                  <a:srgbClr val="8B93A7"/>
+                </a:solidFill>
+                <a:latin typeface="微软雅黑"/>
+              </a:rPr>
+              <a:t>offer 率 98.4% / 平均 5.3 offer / 中位薪资 53 万 / 第 10 周落定 / 去向分散在声剧-γ·鲸火-1·云枢等 8+ 家——基于数十次真实模拟的统计结论，引擎可放大到全量真实市场</a:t>
             </a:r>
           </a:p>
         </p:txBody>
@@ -3449,6 +4409,14 @@
 <file path=ppt/slides/slide4.xml><?xml version="1.0" encoding="utf-8"?>
 <p:sld xmlns:a="http://schemas.openxmlformats.org/drawingml/2006/main" xmlns:p="http://schemas.openxmlformats.org/presentationml/2006/main" xmlns:r="http://schemas.openxmlformats.org/officeDocument/2006/relationships">
   <p:cSld>
+    <p:bg>
+      <p:bgPr>
+        <a:solidFill>
+          <a:srgbClr val="0A0E1A"/>
+        </a:solidFill>
+        <a:effectLst/>
+      </p:bgPr>
+    </p:bg>
     <p:spTree>
       <p:nvGrpSpPr>
         <p:cNvPr id="1" name=""/>
@@ -3458,58 +4426,142 @@
       <p:grpSpPr/>
       <p:sp>
         <p:nvSpPr>
-          <p:cNvPr id="2" name="Title 1"/>
-          <p:cNvSpPr>
-            <a:spLocks noGrp="1"/>
-          </p:cNvSpPr>
-          <p:nvPr>
-            <p:ph type="title"/>
-          </p:nvPr>
-        </p:nvSpPr>
-        <p:spPr/>
-        <p:txBody>
-          <a:bodyPr/>
-          <a:lstStyle/>
-          <a:p>
-            <a:r>
-              <a:t>三个核心反转</a:t>
-            </a:r>
-          </a:p>
-        </p:txBody>
-      </p:sp>
-      <p:sp>
-        <p:nvSpPr>
-          <p:cNvPr id="3" name="Content Placeholder 2"/>
-          <p:cNvSpPr>
-            <a:spLocks noGrp="1"/>
-          </p:cNvSpPr>
-          <p:nvPr>
-            <p:ph idx="1"/>
-          </p:nvPr>
-        </p:nvSpPr>
-        <p:spPr/>
-        <p:txBody>
-          <a:bodyPr/>
-          <a:lstStyle/>
-          <a:p>
-            <a:r>
-              <a:t>1. 结构反转：把一次性的投递赌博，变成可重复的1000次完整春招预演</a:t>
-            </a:r>
-          </a:p>
-          <a:p>
-            <a:r>
-              <a:t>2. 载体反转：从静态PDF简历，变成可交互面试的“数字分身”</a:t>
-            </a:r>
-          </a:p>
-          <a:p>
-            <a:r>
-              <a:t>3. 决策反转：不是含糊地“建议你怎么做”，而是直接展示不同选择在1000次模拟中的“统计结果”</a:t>
-            </a:r>
-          </a:p>
-          <a:p/>
-          <a:p>
-            <a:r>
-              <a:t>竞品都在局部优化，我们在重新定义市场结构。</a:t>
+          <p:cNvPr id="2" name="TextBox 1"/>
+          <p:cNvSpPr txBox="1"/>
+          <p:nvPr/>
+        </p:nvSpPr>
+        <p:spPr>
+          <a:xfrm>
+            <a:off x="822960" y="822960"/>
+            <a:ext cx="10515600" cy="914400"/>
+          </a:xfrm>
+          <a:prstGeom prst="rect">
+            <a:avLst/>
+          </a:prstGeom>
+          <a:noFill/>
+        </p:spPr>
+        <p:txBody>
+          <a:bodyPr wrap="square">
+            <a:spAutoFit/>
+          </a:bodyPr>
+          <a:lstStyle/>
+          <a:p>
+            <a:pPr algn="l"/>
+            <a:r>
+              <a:rPr sz="3200" b="1">
+                <a:solidFill>
+                  <a:srgbClr val="22D3EE"/>
+                </a:solidFill>
+                <a:latin typeface="微软雅黑"/>
+              </a:rPr>
+              <a:t>从预测未来，到实验未来</a:t>
+            </a:r>
+          </a:p>
+        </p:txBody>
+      </p:sp>
+      <p:sp>
+        <p:nvSpPr>
+          <p:cNvPr id="3" name="Rounded Rectangle 2"/>
+          <p:cNvSpPr/>
+          <p:nvPr/>
+        </p:nvSpPr>
+        <p:spPr>
+          <a:xfrm>
+            <a:off x="822960" y="2103120"/>
+            <a:ext cx="10515600" cy="3840480"/>
+          </a:xfrm>
+          <a:prstGeom prst="roundRect">
+            <a:avLst/>
+          </a:prstGeom>
+          <a:solidFill>
+            <a:srgbClr val="131829"/>
+          </a:solidFill>
+          <a:ln w="12700">
+            <a:solidFill>
+              <a:srgbClr val="22D3EE"/>
+            </a:solidFill>
+          </a:ln>
+          <a:effectLst/>
+        </p:spPr>
+        <p:style>
+          <a:lnRef idx="1">
+            <a:schemeClr val="accent1"/>
+          </a:lnRef>
+          <a:fillRef idx="3">
+            <a:schemeClr val="accent1"/>
+          </a:fillRef>
+          <a:effectRef idx="2">
+            <a:schemeClr val="accent1"/>
+          </a:effectRef>
+          <a:fontRef idx="minor">
+            <a:schemeClr val="lt1"/>
+          </a:fontRef>
+        </p:style>
+        <p:txBody>
+          <a:bodyPr rtlCol="0" anchor="t" wrap="square" lIns="457200" tIns="365760"/>
+          <a:lstStyle/>
+          <a:p>
+            <a:pPr algn="ctr">
+              <a:spcAft>
+                <a:spcPts val="1400"/>
+              </a:spcAft>
+            </a:pPr>
+            <a:r>
+              <a:rPr sz="1800" b="0">
+                <a:solidFill>
+                  <a:srgbClr val="E5E9F0"/>
+                </a:solidFill>
+                <a:latin typeface="微软雅黑"/>
+              </a:rPr>
+              <a:t>·  现有 AI 求职工具：当前数据 → 一个预测结果（简历改词 / 面试外挂 / 词袋匹配）</a:t>
+            </a:r>
+          </a:p>
+          <a:p>
+            <a:pPr>
+              <a:spcAft>
+                <a:spcPts val="1400"/>
+              </a:spcAft>
+            </a:pPr>
+            <a:r>
+              <a:rPr sz="1800" b="0">
+                <a:solidFill>
+                  <a:srgbClr val="E5E9F0"/>
+                </a:solidFill>
+                <a:latin typeface="微软雅黑"/>
+              </a:rPr>
+              <a:t>·  我们：当前状态 → 构建虚拟市场 → 观察演化 → 反事实分析</a:t>
+            </a:r>
+          </a:p>
+          <a:p>
+            <a:pPr>
+              <a:spcAft>
+                <a:spcPts val="1400"/>
+              </a:spcAft>
+            </a:pPr>
+            <a:r>
+              <a:rPr sz="1800" b="0">
+                <a:solidFill>
+                  <a:srgbClr val="E5E9F0"/>
+                </a:solidFill>
+                <a:latin typeface="微软雅黑"/>
+              </a:rPr>
+              <a:t>·  从推荐系统到模拟系统的跃迁——改变一个条件，看结局怎么变</a:t>
+            </a:r>
+          </a:p>
+          <a:p>
+            <a:pPr>
+              <a:spcAft>
+                <a:spcPts val="1400"/>
+              </a:spcAft>
+            </a:pPr>
+            <a:r>
+              <a:rPr sz="1800" b="0">
+                <a:solidFill>
+                  <a:srgbClr val="E5E9F0"/>
+                </a:solidFill>
+                <a:latin typeface="微软雅黑"/>
+              </a:rPr>
+              <a:t>·  身位差：别人打磨更快的镰刀，我们造气候模拟器——工具改变效率，只有沙盘能改变战略</a:t>
             </a:r>
           </a:p>
         </p:txBody>
@@ -3525,6 +4577,14 @@
 <file path=ppt/slides/slide5.xml><?xml version="1.0" encoding="utf-8"?>
 <p:sld xmlns:a="http://schemas.openxmlformats.org/drawingml/2006/main" xmlns:p="http://schemas.openxmlformats.org/presentationml/2006/main" xmlns:r="http://schemas.openxmlformats.org/officeDocument/2006/relationships">
   <p:cSld>
+    <p:bg>
+      <p:bgPr>
+        <a:solidFill>
+          <a:srgbClr val="0A0E1A"/>
+        </a:solidFill>
+        <a:effectLst/>
+      </p:bgPr>
+    </p:bg>
     <p:spTree>
       <p:nvGrpSpPr>
         <p:cNvPr id="1" name=""/>
@@ -3532,90 +4592,30 @@
         <p:nvPr/>
       </p:nvGrpSpPr>
       <p:grpSpPr/>
-      <p:sp>
-        <p:nvSpPr>
-          <p:cNvPr id="2" name="Title 1"/>
-          <p:cNvSpPr>
-            <a:spLocks noGrp="1"/>
-          </p:cNvSpPr>
-          <p:nvPr>
-            <p:ph type="title"/>
-          </p:nvPr>
-        </p:nvSpPr>
-        <p:spPr/>
-        <p:txBody>
-          <a:bodyPr/>
-          <a:lstStyle/>
-          <a:p>
-            <a:r>
-              <a:t>绝境案例：一位宝妈的真实推演（真数据·未美化）</a:t>
-            </a:r>
-          </a:p>
-        </p:txBody>
-      </p:sp>
-      <p:sp>
-        <p:nvSpPr>
-          <p:cNvPr id="3" name="Content Placeholder 2"/>
-          <p:cNvSpPr>
-            <a:spLocks noGrp="1"/>
-          </p:cNvSpPr>
-          <p:nvPr>
-            <p:ph idx="1"/>
-          </p:nvPr>
-        </p:nvSpPr>
-        <p:spPr/>
-        <p:txBody>
-          <a:bodyPr/>
-          <a:lstStyle/>
-          <a:p>
-            <a:r>
-              <a:t>画像：28岁 / 文科本科 / 2年全职带娃空窗 / 目标项目管理</a:t>
-            </a:r>
-          </a:p>
-          <a:p>
-            <a:r>
-              <a:t>在约300家公司市场里，每档各真跑8次（共24次真实LLM沙盘）：</a:t>
-            </a:r>
-          </a:p>
-          <a:p/>
-          <a:p>
-            <a:r>
-              <a:t>① 残酷现实（原始）：平均投52份 → 0面试 · 0 offer（8/8全军覆没）</a:t>
-            </a:r>
-          </a:p>
-          <a:p>
-            <a:r>
-              <a:t>② 只改包装（带娃重构为多线程+主攻创业公司+薪资-10%）：仍 0 offer（8/8）</a:t>
-            </a:r>
-          </a:p>
-          <a:p>
-            <a:r>
-              <a:t>③ 真补硬实力（PMP拿证+两个真实项目，含金量25→50）：本赛道仍 0 offer（8/8）</a:t>
-            </a:r>
-          </a:p>
-          <a:p/>
-          <a:p>
-            <a:r>
-              <a:t>沙盘诚实的结论：她的瓶颈不是简历不够漂亮，是赛道错配——</a:t>
-            </a:r>
-          </a:p>
-          <a:p>
-            <a:r>
-              <a:t>该市场约2/3岗位以技术岗打头、平均门槛≈80、超半数要求硕士，她根本够不着。</a:t>
-            </a:r>
-          </a:p>
-          <a:p>
-            <a:r>
-              <a:t>真正的“后悔药”是趁早换一条能上桌的赛道，而非优化措辞。</a:t>
-            </a:r>
-          </a:p>
-          <a:p>
-            <a:r>
-              <a:t>（数字全部真跑得到，结果就是“没翻盘”，如实呈现——诚实是产品立身之本）</a:t>
-            </a:r>
-          </a:p>
-        </p:txBody>
-      </p:sp>
+      <p:pic>
+        <p:nvPicPr>
+          <p:cNvPr id="2" name="Picture 1" descr="design_threelayer.png"/>
+          <p:cNvPicPr>
+            <a:picLocks noChangeAspect="1"/>
+          </p:cNvPicPr>
+          <p:nvPr/>
+        </p:nvPicPr>
+        <p:blipFill>
+          <a:blip r:embed="rId2"/>
+          <a:stretch>
+            <a:fillRect/>
+          </a:stretch>
+        </p:blipFill>
+        <p:spPr>
+          <a:xfrm>
+            <a:off x="0" y="0"/>
+            <a:ext cx="12191695" cy="6858000"/>
+          </a:xfrm>
+          <a:prstGeom prst="rect">
+            <a:avLst/>
+          </a:prstGeom>
+        </p:spPr>
+      </p:pic>
     </p:spTree>
   </p:cSld>
   <p:clrMapOvr>
@@ -3627,6 +4627,14 @@
 <file path=ppt/slides/slide6.xml><?xml version="1.0" encoding="utf-8"?>
 <p:sld xmlns:a="http://schemas.openxmlformats.org/drawingml/2006/main" xmlns:p="http://schemas.openxmlformats.org/presentationml/2006/main" xmlns:r="http://schemas.openxmlformats.org/officeDocument/2006/relationships">
   <p:cSld>
+    <p:bg>
+      <p:bgPr>
+        <a:solidFill>
+          <a:srgbClr val="0A0E1A"/>
+        </a:solidFill>
+        <a:effectLst/>
+      </p:bgPr>
+    </p:bg>
     <p:spTree>
       <p:nvGrpSpPr>
         <p:cNvPr id="1" name=""/>
@@ -3636,72 +4644,94 @@
       <p:grpSpPr/>
       <p:sp>
         <p:nvSpPr>
-          <p:cNvPr id="2" name="Title 1"/>
-          <p:cNvSpPr>
-            <a:spLocks noGrp="1"/>
-          </p:cNvSpPr>
-          <p:nvPr>
-            <p:ph type="title"/>
-          </p:nvPr>
-        </p:nvSpPr>
-        <p:spPr/>
-        <p:txBody>
-          <a:bodyPr/>
-          <a:lstStyle/>
-          <a:p>
-            <a:r>
-              <a:t>技术架构</a:t>
-            </a:r>
-          </a:p>
-        </p:txBody>
-      </p:sp>
-      <p:sp>
-        <p:nvSpPr>
-          <p:cNvPr id="3" name="Content Placeholder 2"/>
-          <p:cNvSpPr>
-            <a:spLocks noGrp="1"/>
-          </p:cNvSpPr>
-          <p:nvPr>
-            <p:ph idx="1"/>
-          </p:nvPr>
-        </p:nvSpPr>
-        <p:spPr/>
-        <p:txBody>
-          <a:bodyPr/>
-          <a:lstStyle/>
-          <a:p>
-            <a:r>
-              <a:t>前端：Vue3 + Three.js (3D沙盘) + D3.js (可视化)</a:t>
-            </a:r>
-          </a:p>
-          <a:p>
-            <a:r>
-              <a:t>后端：FastAPI + Python 3.10</a:t>
-            </a:r>
-          </a:p>
-          <a:p>
-            <a:r>
-              <a:t>核心引擎：自研轻量 Multi-Agent 编排（不用LangGraph）</a:t>
-            </a:r>
-          </a:p>
-          <a:p>
-            <a:r>
-              <a:t> - LLM tier路由，适配多种国内大模型</a:t>
-            </a:r>
-          </a:p>
-          <a:p>
-            <a:r>
-              <a:t> - Candidate/CompanyHR/Interviewer Agent</a:t>
-            </a:r>
-          </a:p>
-          <a:p>
-            <a:r>
-              <a:t>部署方案：</a:t>
-            </a:r>
-          </a:p>
-          <a:p>
-            <a:r>
-              <a:t> - Azure VM + Caddy + Cloudflare CDN</a:t>
+          <p:cNvPr id="2" name="TextBox 1"/>
+          <p:cNvSpPr txBox="1"/>
+          <p:nvPr/>
+        </p:nvSpPr>
+        <p:spPr>
+          <a:xfrm>
+            <a:off x="548640" y="320040"/>
+            <a:ext cx="10972800" cy="731520"/>
+          </a:xfrm>
+          <a:prstGeom prst="rect">
+            <a:avLst/>
+          </a:prstGeom>
+          <a:noFill/>
+        </p:spPr>
+        <p:txBody>
+          <a:bodyPr wrap="square">
+            <a:spAutoFit/>
+          </a:bodyPr>
+          <a:lstStyle/>
+          <a:p>
+            <a:pPr algn="l"/>
+            <a:r>
+              <a:rPr sz="2600" b="1">
+                <a:solidFill>
+                  <a:srgbClr val="22D3EE"/>
+                </a:solidFill>
+                <a:latin typeface="微软雅黑"/>
+              </a:rPr>
+              <a:t>LLM 五维画像评估，透明不黑盒</a:t>
+            </a:r>
+          </a:p>
+        </p:txBody>
+      </p:sp>
+      <p:pic>
+        <p:nvPicPr>
+          <p:cNvPr id="3" name="Picture 2" descr="profile.png"/>
+          <p:cNvPicPr>
+            <a:picLocks noChangeAspect="1"/>
+          </p:cNvPicPr>
+          <p:nvPr/>
+        </p:nvPicPr>
+        <p:blipFill>
+          <a:blip r:embed="rId2"/>
+          <a:stretch>
+            <a:fillRect/>
+          </a:stretch>
+        </p:blipFill>
+        <p:spPr>
+          <a:xfrm>
+            <a:off x="1249527" y="1143000"/>
+            <a:ext cx="9692640" cy="5449824"/>
+          </a:xfrm>
+          <a:prstGeom prst="rect">
+            <a:avLst/>
+          </a:prstGeom>
+        </p:spPr>
+      </p:pic>
+      <p:sp>
+        <p:nvSpPr>
+          <p:cNvPr id="4" name="TextBox 3"/>
+          <p:cNvSpPr txBox="1"/>
+          <p:nvPr/>
+        </p:nvSpPr>
+        <p:spPr>
+          <a:xfrm>
+            <a:off x="548640" y="6400800"/>
+            <a:ext cx="10972800" cy="365760"/>
+          </a:xfrm>
+          <a:prstGeom prst="rect">
+            <a:avLst/>
+          </a:prstGeom>
+          <a:noFill/>
+        </p:spPr>
+        <p:txBody>
+          <a:bodyPr wrap="square">
+            <a:spAutoFit/>
+          </a:bodyPr>
+          <a:lstStyle/>
+          <a:p>
+            <a:pPr algn="l"/>
+            <a:r>
+              <a:rPr sz="1300" b="0">
+                <a:solidFill>
+                  <a:srgbClr val="8B93A7"/>
+                </a:solidFill>
+                <a:latin typeface="微软雅黑"/>
+              </a:rPr>
+              <a:t>每维附评分理由（引用简历证据）+ 学校档 / 学历档双维度加成，综合分可展开</a:t>
             </a:r>
           </a:p>
         </p:txBody>
@@ -3717,6 +4747,14 @@
 <file path=ppt/slides/slide7.xml><?xml version="1.0" encoding="utf-8"?>
 <p:sld xmlns:a="http://schemas.openxmlformats.org/drawingml/2006/main" xmlns:p="http://schemas.openxmlformats.org/presentationml/2006/main" xmlns:r="http://schemas.openxmlformats.org/officeDocument/2006/relationships">
   <p:cSld>
+    <p:bg>
+      <p:bgPr>
+        <a:solidFill>
+          <a:srgbClr val="0A0E1A"/>
+        </a:solidFill>
+        <a:effectLst/>
+      </p:bgPr>
+    </p:bg>
     <p:spTree>
       <p:nvGrpSpPr>
         <p:cNvPr id="1" name=""/>
@@ -3726,74 +4764,94 @@
       <p:grpSpPr/>
       <p:sp>
         <p:nvSpPr>
-          <p:cNvPr id="2" name="Title 1"/>
-          <p:cNvSpPr>
-            <a:spLocks noGrp="1"/>
-          </p:cNvSpPr>
-          <p:nvPr>
-            <p:ph type="title"/>
-          </p:nvPr>
-        </p:nvSpPr>
-        <p:spPr/>
-        <p:txBody>
-          <a:bodyPr/>
-          <a:lstStyle/>
-          <a:p>
-            <a:r>
-              <a:t>商业模式：主战场是高校</a:t>
-            </a:r>
-          </a:p>
-        </p:txBody>
-      </p:sp>
-      <p:sp>
-        <p:nvSpPr>
-          <p:cNvPr id="3" name="Content Placeholder 2"/>
-          <p:cNvSpPr>
-            <a:spLocks noGrp="1"/>
-          </p:cNvSpPr>
-          <p:nvPr>
-            <p:ph idx="1"/>
-          </p:nvPr>
-        </p:nvSpPr>
-        <p:spPr/>
-        <p:txBody>
-          <a:bodyPr/>
-          <a:lstStyle/>
-          <a:p>
-            <a:r>
-              <a:t>主营收：高校就业指导中心（to G SaaS订阅）</a:t>
-            </a:r>
-          </a:p>
-          <a:p>
-            <a:r>
-              <a:t> - 购买群体级人才洞察，将就业指导从“经验驱动”升级为“数据驱动”</a:t>
-            </a:r>
-          </a:p>
-          <a:p/>
-          <a:p>
-            <a:r>
-              <a:t>获客层：C端应届生（免费+数据飞轮）</a:t>
-            </a:r>
-          </a:p>
-          <a:p>
-            <a:r>
-              <a:t> - 口碑传播渗透校内，反推学校采购</a:t>
-            </a:r>
-          </a:p>
-          <a:p/>
-          <a:p>
-            <a:r>
-              <a:t>第二曲线：B端企业与招聘平台</a:t>
-            </a:r>
-          </a:p>
-          <a:p>
-            <a:r>
-              <a:t> - 企业反向品牌报告（你公司在应届生眼里的真实画像）</a:t>
-            </a:r>
-          </a:p>
-          <a:p>
-            <a:r>
-              <a:t> - 与招聘平台集成</a:t>
+          <p:cNvPr id="2" name="TextBox 1"/>
+          <p:cNvSpPr txBox="1"/>
+          <p:nvPr/>
+        </p:nvSpPr>
+        <p:spPr>
+          <a:xfrm>
+            <a:off x="548640" y="320040"/>
+            <a:ext cx="10972800" cy="731520"/>
+          </a:xfrm>
+          <a:prstGeom prst="rect">
+            <a:avLst/>
+          </a:prstGeom>
+          <a:noFill/>
+        </p:spPr>
+        <p:txBody>
+          <a:bodyPr wrap="square">
+            <a:spAutoFit/>
+          </a:bodyPr>
+          <a:lstStyle/>
+          <a:p>
+            <a:pPr algn="l"/>
+            <a:r>
+              <a:rPr sz="2600" b="1">
+                <a:solidFill>
+                  <a:srgbClr val="22D3EE"/>
+                </a:solidFill>
+                <a:latin typeface="微软雅黑"/>
+              </a:rPr>
+              <a:t>3D 沙盘：约 300 家公司星团 · 你的数字分身</a:t>
+            </a:r>
+          </a:p>
+        </p:txBody>
+      </p:sp>
+      <p:pic>
+        <p:nvPicPr>
+          <p:cNvPr id="3" name="Picture 2" descr="sandbox.png"/>
+          <p:cNvPicPr>
+            <a:picLocks noChangeAspect="1"/>
+          </p:cNvPicPr>
+          <p:nvPr/>
+        </p:nvPicPr>
+        <p:blipFill>
+          <a:blip r:embed="rId2"/>
+          <a:stretch>
+            <a:fillRect/>
+          </a:stretch>
+        </p:blipFill>
+        <p:spPr>
+          <a:xfrm>
+            <a:off x="1249527" y="1143000"/>
+            <a:ext cx="9692640" cy="5449824"/>
+          </a:xfrm>
+          <a:prstGeom prst="rect">
+            <a:avLst/>
+          </a:prstGeom>
+        </p:spPr>
+      </p:pic>
+      <p:sp>
+        <p:nvSpPr>
+          <p:cNvPr id="4" name="TextBox 3"/>
+          <p:cNvSpPr txBox="1"/>
+          <p:nvPr/>
+        </p:nvSpPr>
+        <p:spPr>
+          <a:xfrm>
+            <a:off x="548640" y="6400800"/>
+            <a:ext cx="10972800" cy="365760"/>
+          </a:xfrm>
+          <a:prstGeom prst="rect">
+            <a:avLst/>
+          </a:prstGeom>
+          <a:noFill/>
+        </p:spPr>
+        <p:txBody>
+          <a:bodyPr wrap="square">
+            <a:spAutoFit/>
+          </a:bodyPr>
+          <a:lstStyle/>
+          <a:p>
+            <a:pPr algn="l"/>
+            <a:r>
+              <a:rPr sz="1300" b="0">
+                <a:solidFill>
+                  <a:srgbClr val="8B93A7"/>
+                </a:solidFill>
+                <a:latin typeface="微软雅黑"/>
+              </a:rPr>
+              <a:t>每家公司独立 HR Agent，可现场采访；点击公司节点触发投递</a:t>
             </a:r>
           </a:p>
         </p:txBody>
@@ -3809,6 +4867,14 @@
 <file path=ppt/slides/slide8.xml><?xml version="1.0" encoding="utf-8"?>
 <p:sld xmlns:a="http://schemas.openxmlformats.org/drawingml/2006/main" xmlns:p="http://schemas.openxmlformats.org/presentationml/2006/main" xmlns:r="http://schemas.openxmlformats.org/officeDocument/2006/relationships">
   <p:cSld>
+    <p:bg>
+      <p:bgPr>
+        <a:solidFill>
+          <a:srgbClr val="0A0E1A"/>
+        </a:solidFill>
+        <a:effectLst/>
+      </p:bgPr>
+    </p:bg>
     <p:spTree>
       <p:nvGrpSpPr>
         <p:cNvPr id="1" name=""/>
@@ -3818,85 +4884,142 @@
       <p:grpSpPr/>
       <p:sp>
         <p:nvSpPr>
-          <p:cNvPr id="2" name="Title 1"/>
-          <p:cNvSpPr>
-            <a:spLocks noGrp="1"/>
-          </p:cNvSpPr>
-          <p:nvPr>
-            <p:ph type="title"/>
-          </p:nvPr>
-        </p:nvSpPr>
-        <p:spPr/>
-        <p:txBody>
-          <a:bodyPr/>
-          <a:lstStyle/>
-          <a:p>
-            <a:r>
-              <a:t>数字孪生对齐引擎（愿景/路线图，尚未实现）</a:t>
-            </a:r>
-          </a:p>
-        </p:txBody>
-      </p:sp>
-      <p:sp>
-        <p:nvSpPr>
-          <p:cNvPr id="3" name="Content Placeholder 2"/>
-          <p:cNvSpPr>
-            <a:spLocks noGrp="1"/>
-          </p:cNvSpPr>
-          <p:nvPr>
-            <p:ph idx="1"/>
-          </p:nvPr>
-        </p:nvSpPr>
-        <p:spPr/>
-        <p:txBody>
-          <a:bodyPr/>
-          <a:lstStyle/>
-          <a:p>
-            <a:r>
-              <a:t>【本页为接入智联真实数据后的规划，当前尚未实现】</a:t>
-            </a:r>
-          </a:p>
-          <a:p/>
-          <a:p>
-            <a:r>
-              <a:t>现状（冷启动）：</a:t>
-            </a:r>
-          </a:p>
-          <a:p>
-            <a:r>
-              <a:t> - 沙盘里约300个HR Agent的偏好完全由LLM先验知识驱动</a:t>
-            </a:r>
-          </a:p>
-          <a:p>
-            <a:r>
-              <a:t> - 尚未被任何一条真实招聘行为数据校准过</a:t>
-            </a:r>
-          </a:p>
-          <a:p/>
-          <a:p>
-            <a:r>
-              <a:t>规划（接入智联数据后）：</a:t>
-            </a:r>
-          </a:p>
-          <a:p>
-            <a:r>
-              <a:t> - 接入平台真实行为数据（已读不回/发起沟通/发放offer）</a:t>
-            </a:r>
-          </a:p>
-          <a:p>
-            <a:r>
-              <a:t> - 用强化学习持续校准HR Agent的偏好分布</a:t>
-            </a:r>
-          </a:p>
-          <a:p>
-            <a:r>
-              <a:t> - 使沙盘从孤立模拟升级为招聘市场的“实时数字孪生”</a:t>
-            </a:r>
-          </a:p>
-          <a:p/>
-          <a:p>
-            <a:r>
-              <a:t>诚实边界：这一步没有回测数据支撑效果，讲的是方向，不是成果——也是我们希望通过本次决赛促成的合作方向。</a:t>
+          <p:cNvPr id="2" name="TextBox 1"/>
+          <p:cNvSpPr txBox="1"/>
+          <p:nvPr/>
+        </p:nvSpPr>
+        <p:spPr>
+          <a:xfrm>
+            <a:off x="822960" y="822960"/>
+            <a:ext cx="10515600" cy="914400"/>
+          </a:xfrm>
+          <a:prstGeom prst="rect">
+            <a:avLst/>
+          </a:prstGeom>
+          <a:noFill/>
+        </p:spPr>
+        <p:txBody>
+          <a:bodyPr wrap="square">
+            <a:spAutoFit/>
+          </a:bodyPr>
+          <a:lstStyle/>
+          <a:p>
+            <a:pPr algn="l"/>
+            <a:r>
+              <a:rPr sz="3200" b="1">
+                <a:solidFill>
+                  <a:srgbClr val="22D3EE"/>
+                </a:solidFill>
+                <a:latin typeface="微软雅黑"/>
+              </a:rPr>
+              <a:t>反事实预演：从预测未来，到实验未来（核心卖点）</a:t>
+            </a:r>
+          </a:p>
+        </p:txBody>
+      </p:sp>
+      <p:sp>
+        <p:nvSpPr>
+          <p:cNvPr id="3" name="Rounded Rectangle 2"/>
+          <p:cNvSpPr/>
+          <p:nvPr/>
+        </p:nvSpPr>
+        <p:spPr>
+          <a:xfrm>
+            <a:off x="822960" y="2103120"/>
+            <a:ext cx="10515600" cy="3840480"/>
+          </a:xfrm>
+          <a:prstGeom prst="roundRect">
+            <a:avLst/>
+          </a:prstGeom>
+          <a:solidFill>
+            <a:srgbClr val="131829"/>
+          </a:solidFill>
+          <a:ln w="12700">
+            <a:solidFill>
+              <a:srgbClr val="22D3EE"/>
+            </a:solidFill>
+          </a:ln>
+          <a:effectLst/>
+        </p:spPr>
+        <p:style>
+          <a:lnRef idx="1">
+            <a:schemeClr val="accent1"/>
+          </a:lnRef>
+          <a:fillRef idx="3">
+            <a:schemeClr val="accent1"/>
+          </a:fillRef>
+          <a:effectRef idx="2">
+            <a:schemeClr val="accent1"/>
+          </a:effectRef>
+          <a:fontRef idx="minor">
+            <a:schemeClr val="lt1"/>
+          </a:fontRef>
+        </p:style>
+        <p:txBody>
+          <a:bodyPr rtlCol="0" anchor="t" wrap="square" lIns="457200" tIns="365760"/>
+          <a:lstStyle/>
+          <a:p>
+            <a:pPr algn="ctr">
+              <a:spcAft>
+                <a:spcPts val="1400"/>
+              </a:spcAft>
+            </a:pPr>
+            <a:r>
+              <a:rPr sz="1800" b="0">
+                <a:solidFill>
+                  <a:srgbClr val="E5E9F0"/>
+                </a:solidFill>
+                <a:latin typeface="微软雅黑"/>
+              </a:rPr>
+              <a:t>·  拖动三个滑块：简历质量 / 项目含金量 / 学校档，系统把市场重新推演一遍</a:t>
+            </a:r>
+          </a:p>
+          <a:p>
+            <a:pPr>
+              <a:spcAft>
+                <a:spcPts val="1400"/>
+              </a:spcAft>
+            </a:pPr>
+            <a:r>
+              <a:rPr sz="1800" b="0">
+                <a:solidFill>
+                  <a:srgbClr val="E5E9F0"/>
+                </a:solidFill>
+                <a:latin typeface="微软雅黑"/>
+              </a:rPr>
+              <a:t>·  输出 offer 数、薪资、去向的变化——例：项目含金量 +15 → 平均 offer 从 5.3 升到 9.4、中位薪资从 53 万升到 62 万</a:t>
+            </a:r>
+          </a:p>
+          <a:p>
+            <a:pPr>
+              <a:spcAft>
+                <a:spcPts val="1400"/>
+              </a:spcAft>
+            </a:pPr>
+            <a:r>
+              <a:rPr sz="1800" b="0">
+                <a:solidFill>
+                  <a:srgbClr val="E5E9F0"/>
+                </a:solidFill>
+                <a:latin typeface="微软雅黑"/>
+              </a:rPr>
+              <a:t>·  不止告诉你「简历 80 分」，更告诉你「改了会怎样」</a:t>
+            </a:r>
+          </a:p>
+          <a:p>
+            <a:pPr>
+              <a:spcAft>
+                <a:spcPts val="1400"/>
+              </a:spcAft>
+            </a:pPr>
+            <a:r>
+              <a:rPr sz="1800" b="0">
+                <a:solidFill>
+                  <a:srgbClr val="E5E9F0"/>
+                </a:solidFill>
+                <a:latin typeface="微软雅黑"/>
+              </a:rPr>
+              <a:t>·  把职业规划从玄学，变成基于概率与因果的科学决策（现场 demo 可动态演示）</a:t>
             </a:r>
           </a:p>
         </p:txBody>
@@ -3912,6 +5035,14 @@
 <file path=ppt/slides/slide9.xml><?xml version="1.0" encoding="utf-8"?>
 <p:sld xmlns:a="http://schemas.openxmlformats.org/drawingml/2006/main" xmlns:p="http://schemas.openxmlformats.org/presentationml/2006/main" xmlns:r="http://schemas.openxmlformats.org/officeDocument/2006/relationships">
   <p:cSld>
+    <p:bg>
+      <p:bgPr>
+        <a:solidFill>
+          <a:srgbClr val="0A0E1A"/>
+        </a:solidFill>
+        <a:effectLst/>
+      </p:bgPr>
+    </p:bg>
     <p:spTree>
       <p:nvGrpSpPr>
         <p:cNvPr id="1" name=""/>
@@ -3919,85 +5050,30 @@
         <p:nvPr/>
       </p:nvGrpSpPr>
       <p:grpSpPr/>
-      <p:sp>
-        <p:nvSpPr>
-          <p:cNvPr id="2" name="Title 1"/>
-          <p:cNvSpPr>
-            <a:spLocks noGrp="1"/>
-          </p:cNvSpPr>
-          <p:nvPr>
-            <p:ph type="title"/>
-          </p:nvPr>
-        </p:nvSpPr>
-        <p:spPr/>
-        <p:txBody>
-          <a:bodyPr/>
-          <a:lstStyle/>
-          <a:p>
-            <a:r>
-              <a:t>数据合规（0风险）</a:t>
-            </a:r>
-          </a:p>
-        </p:txBody>
-      </p:sp>
-      <p:sp>
-        <p:nvSpPr>
-          <p:cNvPr id="3" name="Content Placeholder 2"/>
-          <p:cNvSpPr>
-            <a:spLocks noGrp="1"/>
-          </p:cNvSpPr>
-          <p:nvPr>
-            <p:ph idx="1"/>
-          </p:nvPr>
-        </p:nvSpPr>
-        <p:spPr/>
-        <p:txBody>
-          <a:bodyPr/>
-          <a:lstStyle/>
-          <a:p>
-            <a:r>
-              <a:t>所有数据均为合成数据：</a:t>
-            </a:r>
-          </a:p>
-          <a:p>
-            <a:r>
-              <a:t> - 49家虚构公司全部代号化（无真实名称）</a:t>
-            </a:r>
-          </a:p>
-          <a:p>
-            <a:r>
-              <a:t> - 200名求职者均为化名生成的persona</a:t>
-            </a:r>
-          </a:p>
-          <a:p/>
-          <a:p>
-            <a:r>
-              <a:t>双层兜底拦截：</a:t>
-            </a:r>
-          </a:p>
-          <a:p>
-            <a:r>
-              <a:t> - Prompt约束不准出现真名</a:t>
-            </a:r>
-          </a:p>
-          <a:p>
-            <a:r>
-              <a:t> - 落盘前强字典扫描替换（47家真公司名拦截）</a:t>
-            </a:r>
-          </a:p>
-          <a:p/>
-          <a:p>
-            <a:r>
-              <a:t>零PII处理：</a:t>
-            </a:r>
-          </a:p>
-          <a:p>
-            <a:r>
-              <a:t> - 用户上传简历仅驻留会话内存，不上云不留存</a:t>
-            </a:r>
-          </a:p>
-        </p:txBody>
-      </p:sp>
+      <p:pic>
+        <p:nvPicPr>
+          <p:cNvPr id="2" name="Picture 1" descr="design_arch.png"/>
+          <p:cNvPicPr>
+            <a:picLocks noChangeAspect="1"/>
+          </p:cNvPicPr>
+          <p:nvPr/>
+        </p:nvPicPr>
+        <p:blipFill>
+          <a:blip r:embed="rId2"/>
+          <a:stretch>
+            <a:fillRect/>
+          </a:stretch>
+        </p:blipFill>
+        <p:spPr>
+          <a:xfrm>
+            <a:off x="0" y="0"/>
+            <a:ext cx="12191695" cy="6858000"/>
+          </a:xfrm>
+          <a:prstGeom prst="rect">
+            <a:avLst/>
+          </a:prstGeom>
+        </p:spPr>
+      </p:pic>
     </p:spTree>
   </p:cSld>
   <p:clrMapOvr>

--- a/docs/submission/春招平行宇宙-决赛答辩.pptx
+++ b/docs/submission/春招平行宇宙-决赛答辩.pptx
@@ -3777,7 +3777,7 @@
                 </a:solidFill>
                 <a:latin typeface="微软雅黑"/>
               </a:rPr>
-              <a:t>绝境案例：一位宝妈的真实推演（真数据 · 未美化）</a:t>
+              <a:t>绝境案例：一个虚构 persona 的沙盘推演（合成画像 · 未美化）</a:t>
             </a:r>
           </a:p>
         </p:txBody>
@@ -3836,7 +3836,7 @@
                 </a:solidFill>
                 <a:latin typeface="微软雅黑"/>
               </a:rPr>
-              <a:t>·  画像：28岁 / 双非本科文科 / 2年全职带娃空窗 / 目标项目管理——在约300家公司大市场真跑，每档各8次（共24次真实LLM沙盘）</a:t>
+              <a:t>·  画像：虚构 persona（合成典型画像，非真人，零PII）——28岁/双非本科文科/2年全职带娃空窗/目标项目管理，在约300家公司大市场真跑，每档各8次（共24次真实LLM沙盘）</a:t>
             </a:r>
           </a:p>
           <a:p>
@@ -3852,7 +3852,7 @@
                 </a:solidFill>
                 <a:latin typeface="微软雅黑"/>
               </a:rPr>
-              <a:t>·  ① 基线（原始简历）：平均投52份 → 0面试 · 0 offer（8/8全军覆没）</a:t>
+              <a:t>·  数据说明：本轮因 DeepSeek 额度耗尽，临时切到 NVIDIA 免费层 llama-3.1-8b-instruct（弱模型）完成，24次全0的结果可能部分反映弱模型筛选偏严苛，以下是这轮推演揭示的方向，非确定结论</a:t>
             </a:r>
           </a:p>
           <a:p>
@@ -3868,7 +3868,7 @@
                 </a:solidFill>
                 <a:latin typeface="微软雅黑"/>
               </a:rPr>
-              <a:t>·  ② 反事实·纯包装（带娃重构为多线程管理+主攻创业公司+薪资降10%）：仍 0 offer（8/8）——包装骗不过硬维度筛选</a:t>
+              <a:t>·  ① 基线（原始简历）：平均投52份 → 0面试 · 0 offer（8/8）</a:t>
             </a:r>
           </a:p>
           <a:p>
@@ -3884,7 +3884,7 @@
                 </a:solidFill>
                 <a:latin typeface="微软雅黑"/>
               </a:rPr>
-              <a:t>·  ③ 反事实·真补实力（PMP拿证+两个真实项目，含金量25→50）：本赛道仍 0 offer（8/8）</a:t>
+              <a:t>·  ② 反事实·纯包装（带娃重构为多线程管理+主攻创业公司+薪资降10%）：仍 0 offer（8/8）——包装未能改变硬维度筛选结果</a:t>
             </a:r>
           </a:p>
           <a:p>
@@ -3900,7 +3900,7 @@
                 </a:solidFill>
                 <a:latin typeface="微软雅黑"/>
               </a:rPr>
-              <a:t>·  真相：瓶颈不是简历措辞，是赛道错配——该市场307家里263家以技术岗打头、57%要求硕士，双非文科转岗天然够不着门槛</a:t>
+              <a:t>·  ③ 反事实·真补实力（PMP拿证+两个真实项目，含金量25→50）：本赛道仍 0 offer（8/8）</a:t>
             </a:r>
           </a:p>
           <a:p>
@@ -3916,7 +3916,23 @@
                 </a:solidFill>
                 <a:latin typeface="微软雅黑"/>
               </a:rPr>
-              <a:t>·  沙盘不是用来证明「努力就能翻盘」的，而是提前告诉你残酷真相：真正的后悔药是趁早换一条能上桌的赛道，而非在错误赛道里死磕包装</a:t>
+              <a:t>·  推演方向：瓶颈可能不是简历措辞，而是赛道错配——该市场307家里263家以技术岗打头、57%要求硕士，双非文科转岗门槛明显更高</a:t>
+            </a:r>
+          </a:p>
+          <a:p>
+            <a:pPr>
+              <a:spcAft>
+                <a:spcPts val="1400"/>
+              </a:spcAft>
+            </a:pPr>
+            <a:r>
+              <a:rPr sz="1800" b="0">
+                <a:solidFill>
+                  <a:srgbClr val="E5E9F0"/>
+                </a:solidFill>
+                <a:latin typeface="微软雅黑"/>
+              </a:rPr>
+              <a:t>·  沙盘不是用来证明「努力就能翻盘」的，而是提前给出一个诚实的方向：与其在同一条赛道死磕包装，不如尽早评估换赛道的可能性</a:t>
             </a:r>
           </a:p>
         </p:txBody>
